--- a/day2-deck/decks/Fixed Gross per Employee Gap - Review.pptx
+++ b/day2-deck/decks/Fixed Gross per Employee Gap - Review.pptx
@@ -1003,7 +1003,7 @@
         <p:spPr>
           <a:xfrm>
             <a:off x="457200" y="1207008"/>
-            <a:ext cx="11274552" cy="4645152"/>
+            <a:ext cx="11274552" cy="4782312"/>
           </a:xfrm>
           <a:prstGeom prst="rect">
             <a:avLst/>
@@ -1257,7 +1257,7 @@
         <p:spPr>
           <a:xfrm>
             <a:off x="658368" y="1700784"/>
-            <a:ext cx="1938528" cy="365760"/>
+            <a:ext cx="1938528" cy="384048"/>
           </a:xfrm>
           <a:prstGeom prst="rect">
             <a:avLst/>
@@ -1295,8 +1295,8 @@
         </p:nvSpPr>
         <p:spPr>
           <a:xfrm>
-            <a:off x="2670048" y="1783080"/>
-            <a:ext cx="585216" cy="201168"/>
+            <a:off x="2670048" y="1787195"/>
+            <a:ext cx="585216" cy="211226"/>
           </a:xfrm>
           <a:prstGeom prst="rect">
             <a:avLst/>
@@ -1316,7 +1316,7 @@
         <p:spPr>
           <a:xfrm>
             <a:off x="3310128" y="1700784"/>
-            <a:ext cx="1024128" cy="365760"/>
+            <a:ext cx="1024128" cy="384048"/>
           </a:xfrm>
           <a:prstGeom prst="rect">
             <a:avLst/>
@@ -1355,7 +1355,7 @@
         <p:spPr>
           <a:xfrm>
             <a:off x="4334256" y="1700784"/>
-            <a:ext cx="768096" cy="365760"/>
+            <a:ext cx="768096" cy="384048"/>
           </a:xfrm>
           <a:prstGeom prst="rect">
             <a:avLst/>
@@ -1394,7 +1394,7 @@
         <p:spPr>
           <a:xfrm>
             <a:off x="5102352" y="1700784"/>
-            <a:ext cx="768096" cy="365760"/>
+            <a:ext cx="768096" cy="384048"/>
           </a:xfrm>
           <a:prstGeom prst="rect">
             <a:avLst/>
@@ -1432,8 +1432,8 @@
         </p:nvSpPr>
         <p:spPr>
           <a:xfrm>
-            <a:off x="658368" y="2066544"/>
-            <a:ext cx="1938528" cy="365760"/>
+            <a:off x="658368" y="2084832"/>
+            <a:ext cx="1938528" cy="384048"/>
           </a:xfrm>
           <a:prstGeom prst="rect">
             <a:avLst/>
@@ -1471,8 +1471,8 @@
         </p:nvSpPr>
         <p:spPr>
           <a:xfrm>
-            <a:off x="2670048" y="2148840"/>
-            <a:ext cx="521308" cy="201168"/>
+            <a:off x="2670048" y="2171243"/>
+            <a:ext cx="521308" cy="211226"/>
           </a:xfrm>
           <a:prstGeom prst="rect">
             <a:avLst/>
@@ -1491,8 +1491,8 @@
         </p:nvSpPr>
         <p:spPr>
           <a:xfrm>
-            <a:off x="3310128" y="2066544"/>
-            <a:ext cx="1024128" cy="365760"/>
+            <a:off x="3310128" y="2084832"/>
+            <a:ext cx="1024128" cy="384048"/>
           </a:xfrm>
           <a:prstGeom prst="rect">
             <a:avLst/>
@@ -1530,8 +1530,8 @@
         </p:nvSpPr>
         <p:spPr>
           <a:xfrm>
-            <a:off x="4334256" y="2066544"/>
-            <a:ext cx="768096" cy="365760"/>
+            <a:off x="4334256" y="2084832"/>
+            <a:ext cx="768096" cy="384048"/>
           </a:xfrm>
           <a:prstGeom prst="rect">
             <a:avLst/>
@@ -1569,8 +1569,8 @@
         </p:nvSpPr>
         <p:spPr>
           <a:xfrm>
-            <a:off x="5102352" y="2066544"/>
-            <a:ext cx="768096" cy="365760"/>
+            <a:off x="5102352" y="2084832"/>
+            <a:ext cx="768096" cy="384048"/>
           </a:xfrm>
           <a:prstGeom prst="rect">
             <a:avLst/>
@@ -1608,8 +1608,8 @@
         </p:nvSpPr>
         <p:spPr>
           <a:xfrm>
-            <a:off x="658368" y="2432304"/>
-            <a:ext cx="1938528" cy="365760"/>
+            <a:off x="658368" y="2468880"/>
+            <a:ext cx="1938528" cy="384048"/>
           </a:xfrm>
           <a:prstGeom prst="rect">
             <a:avLst/>
@@ -1647,8 +1647,8 @@
         </p:nvSpPr>
         <p:spPr>
           <a:xfrm>
-            <a:off x="2670048" y="2514600"/>
-            <a:ext cx="321685" cy="201168"/>
+            <a:off x="2670048" y="2555291"/>
+            <a:ext cx="321685" cy="211226"/>
           </a:xfrm>
           <a:prstGeom prst="rect">
             <a:avLst/>
@@ -1667,8 +1667,8 @@
         </p:nvSpPr>
         <p:spPr>
           <a:xfrm>
-            <a:off x="3310128" y="2432304"/>
-            <a:ext cx="1024128" cy="365760"/>
+            <a:off x="3310128" y="2468880"/>
+            <a:ext cx="1024128" cy="384048"/>
           </a:xfrm>
           <a:prstGeom prst="rect">
             <a:avLst/>
@@ -1706,8 +1706,8 @@
         </p:nvSpPr>
         <p:spPr>
           <a:xfrm>
-            <a:off x="4334256" y="2432304"/>
-            <a:ext cx="768096" cy="365760"/>
+            <a:off x="4334256" y="2468880"/>
+            <a:ext cx="768096" cy="384048"/>
           </a:xfrm>
           <a:prstGeom prst="rect">
             <a:avLst/>
@@ -1745,8 +1745,8 @@
         </p:nvSpPr>
         <p:spPr>
           <a:xfrm>
-            <a:off x="5102352" y="2432304"/>
-            <a:ext cx="768096" cy="365760"/>
+            <a:off x="5102352" y="2468880"/>
+            <a:ext cx="768096" cy="384048"/>
           </a:xfrm>
           <a:prstGeom prst="rect">
             <a:avLst/>
@@ -1784,8 +1784,8 @@
         </p:nvSpPr>
         <p:spPr>
           <a:xfrm>
-            <a:off x="658368" y="2798064"/>
-            <a:ext cx="1938528" cy="365760"/>
+            <a:off x="658368" y="2852928"/>
+            <a:ext cx="1938528" cy="384048"/>
           </a:xfrm>
           <a:prstGeom prst="rect">
             <a:avLst/>
@@ -1823,8 +1823,8 @@
         </p:nvSpPr>
         <p:spPr>
           <a:xfrm>
-            <a:off x="2670048" y="2880360"/>
-            <a:ext cx="313094" cy="201168"/>
+            <a:off x="2670048" y="2939339"/>
+            <a:ext cx="313094" cy="211226"/>
           </a:xfrm>
           <a:prstGeom prst="rect">
             <a:avLst/>
@@ -1843,8 +1843,8 @@
         </p:nvSpPr>
         <p:spPr>
           <a:xfrm>
-            <a:off x="3310128" y="2798064"/>
-            <a:ext cx="1024128" cy="365760"/>
+            <a:off x="3310128" y="2852928"/>
+            <a:ext cx="1024128" cy="384048"/>
           </a:xfrm>
           <a:prstGeom prst="rect">
             <a:avLst/>
@@ -1882,8 +1882,8 @@
         </p:nvSpPr>
         <p:spPr>
           <a:xfrm>
-            <a:off x="4334256" y="2798064"/>
-            <a:ext cx="768096" cy="365760"/>
+            <a:off x="4334256" y="2852928"/>
+            <a:ext cx="768096" cy="384048"/>
           </a:xfrm>
           <a:prstGeom prst="rect">
             <a:avLst/>
@@ -1921,8 +1921,8 @@
         </p:nvSpPr>
         <p:spPr>
           <a:xfrm>
-            <a:off x="5102352" y="2798064"/>
-            <a:ext cx="768096" cy="365760"/>
+            <a:off x="5102352" y="2852928"/>
+            <a:ext cx="768096" cy="384048"/>
           </a:xfrm>
           <a:prstGeom prst="rect">
             <a:avLst/>
@@ -1960,8 +1960,8 @@
         </p:nvSpPr>
         <p:spPr>
           <a:xfrm>
-            <a:off x="658368" y="3163824"/>
-            <a:ext cx="1938528" cy="365760"/>
+            <a:off x="658368" y="3236976"/>
+            <a:ext cx="1938528" cy="384048"/>
           </a:xfrm>
           <a:prstGeom prst="rect">
             <a:avLst/>
@@ -1999,8 +1999,8 @@
         </p:nvSpPr>
         <p:spPr>
           <a:xfrm>
-            <a:off x="2670048" y="3246120"/>
-            <a:ext cx="293540" cy="201168"/>
+            <a:off x="2670048" y="3323387"/>
+            <a:ext cx="293540" cy="211226"/>
           </a:xfrm>
           <a:prstGeom prst="rect">
             <a:avLst/>
@@ -2019,8 +2019,8 @@
         </p:nvSpPr>
         <p:spPr>
           <a:xfrm>
-            <a:off x="3310128" y="3163824"/>
-            <a:ext cx="1024128" cy="365760"/>
+            <a:off x="3310128" y="3236976"/>
+            <a:ext cx="1024128" cy="384048"/>
           </a:xfrm>
           <a:prstGeom prst="rect">
             <a:avLst/>
@@ -2058,8 +2058,8 @@
         </p:nvSpPr>
         <p:spPr>
           <a:xfrm>
-            <a:off x="4334256" y="3163824"/>
-            <a:ext cx="768096" cy="365760"/>
+            <a:off x="4334256" y="3236976"/>
+            <a:ext cx="768096" cy="384048"/>
           </a:xfrm>
           <a:prstGeom prst="rect">
             <a:avLst/>
@@ -2097,8 +2097,8 @@
         </p:nvSpPr>
         <p:spPr>
           <a:xfrm>
-            <a:off x="5102352" y="3163824"/>
-            <a:ext cx="768096" cy="365760"/>
+            <a:off x="5102352" y="3236976"/>
+            <a:ext cx="768096" cy="384048"/>
           </a:xfrm>
           <a:prstGeom prst="rect">
             <a:avLst/>
@@ -2136,8 +2136,8 @@
         </p:nvSpPr>
         <p:spPr>
           <a:xfrm>
-            <a:off x="658368" y="3529584"/>
-            <a:ext cx="1938528" cy="365760"/>
+            <a:off x="658368" y="3621024"/>
+            <a:ext cx="1938528" cy="384048"/>
           </a:xfrm>
           <a:prstGeom prst="rect">
             <a:avLst/>
@@ -2175,8 +2175,8 @@
         </p:nvSpPr>
         <p:spPr>
           <a:xfrm>
-            <a:off x="2670048" y="3611880"/>
-            <a:ext cx="268472" cy="201168"/>
+            <a:off x="2670048" y="3707435"/>
+            <a:ext cx="268472" cy="211226"/>
           </a:xfrm>
           <a:prstGeom prst="rect">
             <a:avLst/>
@@ -2195,8 +2195,8 @@
         </p:nvSpPr>
         <p:spPr>
           <a:xfrm>
-            <a:off x="3310128" y="3529584"/>
-            <a:ext cx="1024128" cy="365760"/>
+            <a:off x="3310128" y="3621024"/>
+            <a:ext cx="1024128" cy="384048"/>
           </a:xfrm>
           <a:prstGeom prst="rect">
             <a:avLst/>
@@ -2234,8 +2234,8 @@
         </p:nvSpPr>
         <p:spPr>
           <a:xfrm>
-            <a:off x="4334256" y="3529584"/>
-            <a:ext cx="768096" cy="365760"/>
+            <a:off x="4334256" y="3621024"/>
+            <a:ext cx="768096" cy="384048"/>
           </a:xfrm>
           <a:prstGeom prst="rect">
             <a:avLst/>
@@ -2273,8 +2273,8 @@
         </p:nvSpPr>
         <p:spPr>
           <a:xfrm>
-            <a:off x="5102352" y="3529584"/>
-            <a:ext cx="768096" cy="365760"/>
+            <a:off x="5102352" y="3621024"/>
+            <a:ext cx="768096" cy="384048"/>
           </a:xfrm>
           <a:prstGeom prst="rect">
             <a:avLst/>
@@ -2312,8 +2312,8 @@
         </p:nvSpPr>
         <p:spPr>
           <a:xfrm>
-            <a:off x="658368" y="3895344"/>
-            <a:ext cx="1938528" cy="365760"/>
+            <a:off x="658368" y="4005072"/>
+            <a:ext cx="1938528" cy="384048"/>
           </a:xfrm>
           <a:prstGeom prst="rect">
             <a:avLst/>
@@ -2351,8 +2351,8 @@
         </p:nvSpPr>
         <p:spPr>
           <a:xfrm>
-            <a:off x="2670048" y="3977640"/>
-            <a:ext cx="252516" cy="201168"/>
+            <a:off x="2670048" y="4091483"/>
+            <a:ext cx="252516" cy="211226"/>
           </a:xfrm>
           <a:prstGeom prst="rect">
             <a:avLst/>
@@ -2371,8 +2371,8 @@
         </p:nvSpPr>
         <p:spPr>
           <a:xfrm>
-            <a:off x="3310128" y="3895344"/>
-            <a:ext cx="1024128" cy="365760"/>
+            <a:off x="3310128" y="4005072"/>
+            <a:ext cx="1024128" cy="384048"/>
           </a:xfrm>
           <a:prstGeom prst="rect">
             <a:avLst/>
@@ -2410,8 +2410,8 @@
         </p:nvSpPr>
         <p:spPr>
           <a:xfrm>
-            <a:off x="4334256" y="3895344"/>
-            <a:ext cx="768096" cy="365760"/>
+            <a:off x="4334256" y="4005072"/>
+            <a:ext cx="768096" cy="384048"/>
           </a:xfrm>
           <a:prstGeom prst="rect">
             <a:avLst/>
@@ -2449,8 +2449,8 @@
         </p:nvSpPr>
         <p:spPr>
           <a:xfrm>
-            <a:off x="5102352" y="3895344"/>
-            <a:ext cx="768096" cy="365760"/>
+            <a:off x="5102352" y="4005072"/>
+            <a:ext cx="768096" cy="384048"/>
           </a:xfrm>
           <a:prstGeom prst="rect">
             <a:avLst/>
@@ -2488,8 +2488,8 @@
         </p:nvSpPr>
         <p:spPr>
           <a:xfrm>
-            <a:off x="658368" y="4261104"/>
-            <a:ext cx="1938528" cy="365760"/>
+            <a:off x="658368" y="4389120"/>
+            <a:ext cx="1938528" cy="384048"/>
           </a:xfrm>
           <a:prstGeom prst="rect">
             <a:avLst/>
@@ -2527,8 +2527,8 @@
         </p:nvSpPr>
         <p:spPr>
           <a:xfrm>
-            <a:off x="2670048" y="4343400"/>
-            <a:ext cx="244133" cy="201168"/>
+            <a:off x="2670048" y="4475531"/>
+            <a:ext cx="244133" cy="211226"/>
           </a:xfrm>
           <a:prstGeom prst="rect">
             <a:avLst/>
@@ -2547,8 +2547,8 @@
         </p:nvSpPr>
         <p:spPr>
           <a:xfrm>
-            <a:off x="3310128" y="4261104"/>
-            <a:ext cx="1024128" cy="365760"/>
+            <a:off x="3310128" y="4389120"/>
+            <a:ext cx="1024128" cy="384048"/>
           </a:xfrm>
           <a:prstGeom prst="rect">
             <a:avLst/>
@@ -2586,8 +2586,8 @@
         </p:nvSpPr>
         <p:spPr>
           <a:xfrm>
-            <a:off x="4334256" y="4261104"/>
-            <a:ext cx="768096" cy="365760"/>
+            <a:off x="4334256" y="4389120"/>
+            <a:ext cx="768096" cy="384048"/>
           </a:xfrm>
           <a:prstGeom prst="rect">
             <a:avLst/>
@@ -2625,8 +2625,8 @@
         </p:nvSpPr>
         <p:spPr>
           <a:xfrm>
-            <a:off x="5102352" y="4261104"/>
-            <a:ext cx="768096" cy="365760"/>
+            <a:off x="5102352" y="4389120"/>
+            <a:ext cx="768096" cy="384048"/>
           </a:xfrm>
           <a:prstGeom prst="rect">
             <a:avLst/>
@@ -2664,8 +2664,8 @@
         </p:nvSpPr>
         <p:spPr>
           <a:xfrm>
-            <a:off x="658368" y="4626864"/>
-            <a:ext cx="1938528" cy="365760"/>
+            <a:off x="658368" y="4773168"/>
+            <a:ext cx="1938528" cy="384048"/>
           </a:xfrm>
           <a:prstGeom prst="rect">
             <a:avLst/>
@@ -2703,8 +2703,8 @@
         </p:nvSpPr>
         <p:spPr>
           <a:xfrm>
-            <a:off x="2670048" y="4709160"/>
-            <a:ext cx="243998" cy="201168"/>
+            <a:off x="2670048" y="4859579"/>
+            <a:ext cx="243998" cy="211226"/>
           </a:xfrm>
           <a:prstGeom prst="rect">
             <a:avLst/>
@@ -2723,8 +2723,8 @@
         </p:nvSpPr>
         <p:spPr>
           <a:xfrm>
-            <a:off x="3310128" y="4626864"/>
-            <a:ext cx="1024128" cy="365760"/>
+            <a:off x="3310128" y="4773168"/>
+            <a:ext cx="1024128" cy="384048"/>
           </a:xfrm>
           <a:prstGeom prst="rect">
             <a:avLst/>
@@ -2762,8 +2762,8 @@
         </p:nvSpPr>
         <p:spPr>
           <a:xfrm>
-            <a:off x="4334256" y="4626864"/>
-            <a:ext cx="768096" cy="365760"/>
+            <a:off x="4334256" y="4773168"/>
+            <a:ext cx="768096" cy="384048"/>
           </a:xfrm>
           <a:prstGeom prst="rect">
             <a:avLst/>
@@ -2801,8 +2801,8 @@
         </p:nvSpPr>
         <p:spPr>
           <a:xfrm>
-            <a:off x="5102352" y="4626864"/>
-            <a:ext cx="768096" cy="365760"/>
+            <a:off x="5102352" y="4773168"/>
+            <a:ext cx="768096" cy="384048"/>
           </a:xfrm>
           <a:prstGeom prst="rect">
             <a:avLst/>
@@ -2840,8 +2840,8 @@
         </p:nvSpPr>
         <p:spPr>
           <a:xfrm>
-            <a:off x="658368" y="4992624"/>
-            <a:ext cx="1938528" cy="365760"/>
+            <a:off x="658368" y="5157216"/>
+            <a:ext cx="1938528" cy="384048"/>
           </a:xfrm>
           <a:prstGeom prst="rect">
             <a:avLst/>
@@ -2879,8 +2879,8 @@
         </p:nvSpPr>
         <p:spPr>
           <a:xfrm>
-            <a:off x="2670048" y="5074920"/>
-            <a:ext cx="197721" cy="201168"/>
+            <a:off x="2670048" y="5243627"/>
+            <a:ext cx="197721" cy="211226"/>
           </a:xfrm>
           <a:prstGeom prst="rect">
             <a:avLst/>
@@ -2899,8 +2899,8 @@
         </p:nvSpPr>
         <p:spPr>
           <a:xfrm>
-            <a:off x="3310128" y="4992624"/>
-            <a:ext cx="1024128" cy="365760"/>
+            <a:off x="3310128" y="5157216"/>
+            <a:ext cx="1024128" cy="384048"/>
           </a:xfrm>
           <a:prstGeom prst="rect">
             <a:avLst/>
@@ -2938,8 +2938,8 @@
         </p:nvSpPr>
         <p:spPr>
           <a:xfrm>
-            <a:off x="4334256" y="4992624"/>
-            <a:ext cx="768096" cy="365760"/>
+            <a:off x="4334256" y="5157216"/>
+            <a:ext cx="768096" cy="384048"/>
           </a:xfrm>
           <a:prstGeom prst="rect">
             <a:avLst/>
@@ -2977,8 +2977,8 @@
         </p:nvSpPr>
         <p:spPr>
           <a:xfrm>
-            <a:off x="5102352" y="4992624"/>
-            <a:ext cx="768096" cy="365760"/>
+            <a:off x="5102352" y="5157216"/>
+            <a:ext cx="768096" cy="384048"/>
           </a:xfrm>
           <a:prstGeom prst="rect">
             <a:avLst/>
@@ -3016,8 +3016,8 @@
         </p:nvSpPr>
         <p:spPr>
           <a:xfrm>
-            <a:off x="658368" y="5358384"/>
-            <a:ext cx="1938528" cy="365760"/>
+            <a:off x="658368" y="5541264"/>
+            <a:ext cx="1938528" cy="384048"/>
           </a:xfrm>
           <a:prstGeom prst="rect">
             <a:avLst/>
@@ -3055,8 +3055,8 @@
         </p:nvSpPr>
         <p:spPr>
           <a:xfrm>
-            <a:off x="2670048" y="5440680"/>
-            <a:ext cx="197008" cy="201168"/>
+            <a:off x="2670048" y="5627675"/>
+            <a:ext cx="197008" cy="211226"/>
           </a:xfrm>
           <a:prstGeom prst="rect">
             <a:avLst/>
@@ -3075,8 +3075,8 @@
         </p:nvSpPr>
         <p:spPr>
           <a:xfrm>
-            <a:off x="3310128" y="5358384"/>
-            <a:ext cx="1024128" cy="365760"/>
+            <a:off x="3310128" y="5541264"/>
+            <a:ext cx="1024128" cy="384048"/>
           </a:xfrm>
           <a:prstGeom prst="rect">
             <a:avLst/>
@@ -3114,8 +3114,8 @@
         </p:nvSpPr>
         <p:spPr>
           <a:xfrm>
-            <a:off x="4334256" y="5358384"/>
-            <a:ext cx="768096" cy="365760"/>
+            <a:off x="4334256" y="5541264"/>
+            <a:ext cx="768096" cy="384048"/>
           </a:xfrm>
           <a:prstGeom prst="rect">
             <a:avLst/>
@@ -3153,8 +3153,8 @@
         </p:nvSpPr>
         <p:spPr>
           <a:xfrm>
-            <a:off x="5102352" y="5358384"/>
-            <a:ext cx="768096" cy="365760"/>
+            <a:off x="5102352" y="5541264"/>
+            <a:ext cx="768096" cy="384048"/>
           </a:xfrm>
           <a:prstGeom prst="rect">
             <a:avLst/>
@@ -3193,7 +3193,7 @@
         <p:spPr>
           <a:xfrm>
             <a:off x="6208776" y="1700784"/>
-            <a:ext cx="1938528" cy="365760"/>
+            <a:ext cx="1938528" cy="384048"/>
           </a:xfrm>
           <a:prstGeom prst="rect">
             <a:avLst/>
@@ -3231,8 +3231,8 @@
         </p:nvSpPr>
         <p:spPr>
           <a:xfrm>
-            <a:off x="8220456" y="1783080"/>
-            <a:ext cx="96145" cy="201168"/>
+            <a:off x="8220456" y="1787195"/>
+            <a:ext cx="96145" cy="211226"/>
           </a:xfrm>
           <a:prstGeom prst="rect">
             <a:avLst/>
@@ -3252,7 +3252,7 @@
         <p:spPr>
           <a:xfrm>
             <a:off x="8860536" y="1700784"/>
-            <a:ext cx="1024128" cy="365760"/>
+            <a:ext cx="1024128" cy="384048"/>
           </a:xfrm>
           <a:prstGeom prst="rect">
             <a:avLst/>
@@ -3291,7 +3291,7 @@
         <p:spPr>
           <a:xfrm>
             <a:off x="9884664" y="1700784"/>
-            <a:ext cx="768096" cy="365760"/>
+            <a:ext cx="768096" cy="384048"/>
           </a:xfrm>
           <a:prstGeom prst="rect">
             <a:avLst/>
@@ -3330,7 +3330,7 @@
         <p:spPr>
           <a:xfrm>
             <a:off x="10652760" y="1700784"/>
-            <a:ext cx="768096" cy="365760"/>
+            <a:ext cx="768096" cy="384048"/>
           </a:xfrm>
           <a:prstGeom prst="rect">
             <a:avLst/>
@@ -3368,8 +3368,8 @@
         </p:nvSpPr>
         <p:spPr>
           <a:xfrm>
-            <a:off x="6208776" y="2066544"/>
-            <a:ext cx="1938528" cy="365760"/>
+            <a:off x="6208776" y="2084832"/>
+            <a:ext cx="1938528" cy="384048"/>
           </a:xfrm>
           <a:prstGeom prst="rect">
             <a:avLst/>
@@ -3407,8 +3407,8 @@
         </p:nvSpPr>
         <p:spPr>
           <a:xfrm>
-            <a:off x="8220456" y="2148840"/>
-            <a:ext cx="89775" cy="201168"/>
+            <a:off x="8220456" y="2171243"/>
+            <a:ext cx="89775" cy="211226"/>
           </a:xfrm>
           <a:prstGeom prst="rect">
             <a:avLst/>
@@ -3427,8 +3427,8 @@
         </p:nvSpPr>
         <p:spPr>
           <a:xfrm>
-            <a:off x="8860536" y="2066544"/>
-            <a:ext cx="1024128" cy="365760"/>
+            <a:off x="8860536" y="2084832"/>
+            <a:ext cx="1024128" cy="384048"/>
           </a:xfrm>
           <a:prstGeom prst="rect">
             <a:avLst/>
@@ -3466,8 +3466,8 @@
         </p:nvSpPr>
         <p:spPr>
           <a:xfrm>
-            <a:off x="9884664" y="2066544"/>
-            <a:ext cx="768096" cy="365760"/>
+            <a:off x="9884664" y="2084832"/>
+            <a:ext cx="768096" cy="384048"/>
           </a:xfrm>
           <a:prstGeom prst="rect">
             <a:avLst/>
@@ -3505,8 +3505,8 @@
         </p:nvSpPr>
         <p:spPr>
           <a:xfrm>
-            <a:off x="10652760" y="2066544"/>
-            <a:ext cx="768096" cy="365760"/>
+            <a:off x="10652760" y="2084832"/>
+            <a:ext cx="768096" cy="384048"/>
           </a:xfrm>
           <a:prstGeom prst="rect">
             <a:avLst/>
@@ -3544,8 +3544,8 @@
         </p:nvSpPr>
         <p:spPr>
           <a:xfrm>
-            <a:off x="6208776" y="2432304"/>
-            <a:ext cx="1938528" cy="365760"/>
+            <a:off x="6208776" y="2468880"/>
+            <a:ext cx="1938528" cy="384048"/>
           </a:xfrm>
           <a:prstGeom prst="rect">
             <a:avLst/>
@@ -3583,8 +3583,8 @@
         </p:nvSpPr>
         <p:spPr>
           <a:xfrm>
-            <a:off x="8220456" y="2514600"/>
-            <a:ext cx="88284" cy="201168"/>
+            <a:off x="8220456" y="2555291"/>
+            <a:ext cx="88284" cy="211226"/>
           </a:xfrm>
           <a:prstGeom prst="rect">
             <a:avLst/>
@@ -3603,8 +3603,8 @@
         </p:nvSpPr>
         <p:spPr>
           <a:xfrm>
-            <a:off x="8860536" y="2432304"/>
-            <a:ext cx="1024128" cy="365760"/>
+            <a:off x="8860536" y="2468880"/>
+            <a:ext cx="1024128" cy="384048"/>
           </a:xfrm>
           <a:prstGeom prst="rect">
             <a:avLst/>
@@ -3642,8 +3642,8 @@
         </p:nvSpPr>
         <p:spPr>
           <a:xfrm>
-            <a:off x="9884664" y="2432304"/>
-            <a:ext cx="768096" cy="365760"/>
+            <a:off x="9884664" y="2468880"/>
+            <a:ext cx="768096" cy="384048"/>
           </a:xfrm>
           <a:prstGeom prst="rect">
             <a:avLst/>
@@ -3681,8 +3681,8 @@
         </p:nvSpPr>
         <p:spPr>
           <a:xfrm>
-            <a:off x="10652760" y="2432304"/>
-            <a:ext cx="768096" cy="365760"/>
+            <a:off x="10652760" y="2468880"/>
+            <a:ext cx="768096" cy="384048"/>
           </a:xfrm>
           <a:prstGeom prst="rect">
             <a:avLst/>
@@ -3720,8 +3720,8 @@
         </p:nvSpPr>
         <p:spPr>
           <a:xfrm>
-            <a:off x="6208776" y="2798064"/>
-            <a:ext cx="1938528" cy="365760"/>
+            <a:off x="6208776" y="2852928"/>
+            <a:ext cx="1938528" cy="384048"/>
           </a:xfrm>
           <a:prstGeom prst="rect">
             <a:avLst/>
@@ -3759,8 +3759,8 @@
         </p:nvSpPr>
         <p:spPr>
           <a:xfrm>
-            <a:off x="8220456" y="2880360"/>
-            <a:ext cx="81589" cy="201168"/>
+            <a:off x="8220456" y="2939339"/>
+            <a:ext cx="81589" cy="211226"/>
           </a:xfrm>
           <a:prstGeom prst="rect">
             <a:avLst/>
@@ -3779,8 +3779,8 @@
         </p:nvSpPr>
         <p:spPr>
           <a:xfrm>
-            <a:off x="8860536" y="2798064"/>
-            <a:ext cx="1024128" cy="365760"/>
+            <a:off x="8860536" y="2852928"/>
+            <a:ext cx="1024128" cy="384048"/>
           </a:xfrm>
           <a:prstGeom prst="rect">
             <a:avLst/>
@@ -3818,8 +3818,8 @@
         </p:nvSpPr>
         <p:spPr>
           <a:xfrm>
-            <a:off x="9884664" y="2798064"/>
-            <a:ext cx="768096" cy="365760"/>
+            <a:off x="9884664" y="2852928"/>
+            <a:ext cx="768096" cy="384048"/>
           </a:xfrm>
           <a:prstGeom prst="rect">
             <a:avLst/>
@@ -3857,8 +3857,8 @@
         </p:nvSpPr>
         <p:spPr>
           <a:xfrm>
-            <a:off x="10652760" y="2798064"/>
-            <a:ext cx="768096" cy="365760"/>
+            <a:off x="10652760" y="2852928"/>
+            <a:ext cx="768096" cy="384048"/>
           </a:xfrm>
           <a:prstGeom prst="rect">
             <a:avLst/>
@@ -3896,8 +3896,8 @@
         </p:nvSpPr>
         <p:spPr>
           <a:xfrm>
-            <a:off x="6208776" y="3163824"/>
-            <a:ext cx="1938528" cy="365760"/>
+            <a:off x="6208776" y="3236976"/>
+            <a:ext cx="1938528" cy="384048"/>
           </a:xfrm>
           <a:prstGeom prst="rect">
             <a:avLst/>
@@ -3935,8 +3935,8 @@
         </p:nvSpPr>
         <p:spPr>
           <a:xfrm>
-            <a:off x="8220456" y="3246120"/>
-            <a:ext cx="73764" cy="201168"/>
+            <a:off x="8220456" y="3323387"/>
+            <a:ext cx="73764" cy="211226"/>
           </a:xfrm>
           <a:prstGeom prst="rect">
             <a:avLst/>
@@ -3955,8 +3955,8 @@
         </p:nvSpPr>
         <p:spPr>
           <a:xfrm>
-            <a:off x="8860536" y="3163824"/>
-            <a:ext cx="1024128" cy="365760"/>
+            <a:off x="8860536" y="3236976"/>
+            <a:ext cx="1024128" cy="384048"/>
           </a:xfrm>
           <a:prstGeom prst="rect">
             <a:avLst/>
@@ -3994,8 +3994,8 @@
         </p:nvSpPr>
         <p:spPr>
           <a:xfrm>
-            <a:off x="9884664" y="3163824"/>
-            <a:ext cx="768096" cy="365760"/>
+            <a:off x="9884664" y="3236976"/>
+            <a:ext cx="768096" cy="384048"/>
           </a:xfrm>
           <a:prstGeom prst="rect">
             <a:avLst/>
@@ -4033,8 +4033,8 @@
         </p:nvSpPr>
         <p:spPr>
           <a:xfrm>
-            <a:off x="10652760" y="3163824"/>
-            <a:ext cx="768096" cy="365760"/>
+            <a:off x="10652760" y="3236976"/>
+            <a:ext cx="768096" cy="384048"/>
           </a:xfrm>
           <a:prstGeom prst="rect">
             <a:avLst/>
@@ -4072,8 +4072,8 @@
         </p:nvSpPr>
         <p:spPr>
           <a:xfrm>
-            <a:off x="6208776" y="3529584"/>
-            <a:ext cx="1938528" cy="365760"/>
+            <a:off x="6208776" y="3621024"/>
+            <a:ext cx="1938528" cy="384048"/>
           </a:xfrm>
           <a:prstGeom prst="rect">
             <a:avLst/>
@@ -4111,8 +4111,8 @@
         </p:nvSpPr>
         <p:spPr>
           <a:xfrm>
-            <a:off x="8220456" y="3611880"/>
-            <a:ext cx="45418" cy="201168"/>
+            <a:off x="8220456" y="3707435"/>
+            <a:ext cx="45418" cy="211226"/>
           </a:xfrm>
           <a:prstGeom prst="rect">
             <a:avLst/>
@@ -4131,8 +4131,8 @@
         </p:nvSpPr>
         <p:spPr>
           <a:xfrm>
-            <a:off x="8860536" y="3529584"/>
-            <a:ext cx="1024128" cy="365760"/>
+            <a:off x="8860536" y="3621024"/>
+            <a:ext cx="1024128" cy="384048"/>
           </a:xfrm>
           <a:prstGeom prst="rect">
             <a:avLst/>
@@ -4170,8 +4170,8 @@
         </p:nvSpPr>
         <p:spPr>
           <a:xfrm>
-            <a:off x="9884664" y="3529584"/>
-            <a:ext cx="768096" cy="365760"/>
+            <a:off x="9884664" y="3621024"/>
+            <a:ext cx="768096" cy="384048"/>
           </a:xfrm>
           <a:prstGeom prst="rect">
             <a:avLst/>
@@ -4209,8 +4209,8 @@
         </p:nvSpPr>
         <p:spPr>
           <a:xfrm>
-            <a:off x="10652760" y="3529584"/>
-            <a:ext cx="768096" cy="365760"/>
+            <a:off x="10652760" y="3621024"/>
+            <a:ext cx="768096" cy="384048"/>
           </a:xfrm>
           <a:prstGeom prst="rect">
             <a:avLst/>
@@ -4248,8 +4248,8 @@
         </p:nvSpPr>
         <p:spPr>
           <a:xfrm>
-            <a:off x="6208776" y="3895344"/>
-            <a:ext cx="1938528" cy="365760"/>
+            <a:off x="6208776" y="4005072"/>
+            <a:ext cx="1938528" cy="384048"/>
           </a:xfrm>
           <a:prstGeom prst="rect">
             <a:avLst/>
@@ -4287,8 +4287,8 @@
         </p:nvSpPr>
         <p:spPr>
           <a:xfrm>
-            <a:off x="8220456" y="3977640"/>
-            <a:ext cx="37443" cy="201168"/>
+            <a:off x="8220456" y="4091483"/>
+            <a:ext cx="37443" cy="211226"/>
           </a:xfrm>
           <a:prstGeom prst="rect">
             <a:avLst/>
@@ -4307,8 +4307,8 @@
         </p:nvSpPr>
         <p:spPr>
           <a:xfrm>
-            <a:off x="8860536" y="3895344"/>
-            <a:ext cx="1024128" cy="365760"/>
+            <a:off x="8860536" y="4005072"/>
+            <a:ext cx="1024128" cy="384048"/>
           </a:xfrm>
           <a:prstGeom prst="rect">
             <a:avLst/>
@@ -4346,8 +4346,8 @@
         </p:nvSpPr>
         <p:spPr>
           <a:xfrm>
-            <a:off x="9884664" y="3895344"/>
-            <a:ext cx="768096" cy="365760"/>
+            <a:off x="9884664" y="4005072"/>
+            <a:ext cx="768096" cy="384048"/>
           </a:xfrm>
           <a:prstGeom prst="rect">
             <a:avLst/>
@@ -4385,8 +4385,8 @@
         </p:nvSpPr>
         <p:spPr>
           <a:xfrm>
-            <a:off x="10652760" y="3895344"/>
-            <a:ext cx="768096" cy="365760"/>
+            <a:off x="10652760" y="4005072"/>
+            <a:ext cx="768096" cy="384048"/>
           </a:xfrm>
           <a:prstGeom prst="rect">
             <a:avLst/>
@@ -4424,8 +4424,8 @@
         </p:nvSpPr>
         <p:spPr>
           <a:xfrm>
-            <a:off x="6208776" y="4261104"/>
-            <a:ext cx="1938528" cy="365760"/>
+            <a:off x="6208776" y="4389120"/>
+            <a:ext cx="1938528" cy="384048"/>
           </a:xfrm>
           <a:prstGeom prst="rect">
             <a:avLst/>
@@ -4463,8 +4463,8 @@
         </p:nvSpPr>
         <p:spPr>
           <a:xfrm>
-            <a:off x="8220456" y="4343400"/>
-            <a:ext cx="26036" cy="201168"/>
+            <a:off x="8220456" y="4475531"/>
+            <a:ext cx="26036" cy="211226"/>
           </a:xfrm>
           <a:prstGeom prst="rect">
             <a:avLst/>
@@ -4483,8 +4483,8 @@
         </p:nvSpPr>
         <p:spPr>
           <a:xfrm>
-            <a:off x="8860536" y="4261104"/>
-            <a:ext cx="1024128" cy="365760"/>
+            <a:off x="8860536" y="4389120"/>
+            <a:ext cx="1024128" cy="384048"/>
           </a:xfrm>
           <a:prstGeom prst="rect">
             <a:avLst/>
@@ -4522,8 +4522,8 @@
         </p:nvSpPr>
         <p:spPr>
           <a:xfrm>
-            <a:off x="9884664" y="4261104"/>
-            <a:ext cx="768096" cy="365760"/>
+            <a:off x="9884664" y="4389120"/>
+            <a:ext cx="768096" cy="384048"/>
           </a:xfrm>
           <a:prstGeom prst="rect">
             <a:avLst/>
@@ -4561,8 +4561,8 @@
         </p:nvSpPr>
         <p:spPr>
           <a:xfrm>
-            <a:off x="10652760" y="4261104"/>
-            <a:ext cx="768096" cy="365760"/>
+            <a:off x="10652760" y="4389120"/>
+            <a:ext cx="768096" cy="384048"/>
           </a:xfrm>
           <a:prstGeom prst="rect">
             <a:avLst/>
@@ -4600,8 +4600,8 @@
         </p:nvSpPr>
         <p:spPr>
           <a:xfrm>
-            <a:off x="6208776" y="4626864"/>
-            <a:ext cx="1938528" cy="365760"/>
+            <a:off x="6208776" y="4773168"/>
+            <a:ext cx="1938528" cy="384048"/>
           </a:xfrm>
           <a:prstGeom prst="rect">
             <a:avLst/>
@@ -4639,8 +4639,8 @@
         </p:nvSpPr>
         <p:spPr>
           <a:xfrm>
-            <a:off x="8220456" y="4709160"/>
-            <a:ext cx="18288" cy="201168"/>
+            <a:off x="8220456" y="4859579"/>
+            <a:ext cx="18288" cy="211226"/>
           </a:xfrm>
           <a:prstGeom prst="rect">
             <a:avLst/>
@@ -4659,8 +4659,8 @@
         </p:nvSpPr>
         <p:spPr>
           <a:xfrm>
-            <a:off x="8860536" y="4626864"/>
-            <a:ext cx="1024128" cy="365760"/>
+            <a:off x="8860536" y="4773168"/>
+            <a:ext cx="1024128" cy="384048"/>
           </a:xfrm>
           <a:prstGeom prst="rect">
             <a:avLst/>
@@ -4698,8 +4698,8 @@
         </p:nvSpPr>
         <p:spPr>
           <a:xfrm>
-            <a:off x="9884664" y="4626864"/>
-            <a:ext cx="768096" cy="365760"/>
+            <a:off x="9884664" y="4773168"/>
+            <a:ext cx="768096" cy="384048"/>
           </a:xfrm>
           <a:prstGeom prst="rect">
             <a:avLst/>
@@ -4737,8 +4737,8 @@
         </p:nvSpPr>
         <p:spPr>
           <a:xfrm>
-            <a:off x="10652760" y="4626864"/>
-            <a:ext cx="768096" cy="365760"/>
+            <a:off x="10652760" y="4773168"/>
+            <a:ext cx="768096" cy="384048"/>
           </a:xfrm>
           <a:prstGeom prst="rect">
             <a:avLst/>
@@ -4776,8 +4776,8 @@
         </p:nvSpPr>
         <p:spPr>
           <a:xfrm>
-            <a:off x="6208776" y="4992624"/>
-            <a:ext cx="1938528" cy="365760"/>
+            <a:off x="6208776" y="5157216"/>
+            <a:ext cx="1938528" cy="384048"/>
           </a:xfrm>
           <a:prstGeom prst="rect">
             <a:avLst/>
@@ -4815,8 +4815,8 @@
         </p:nvSpPr>
         <p:spPr>
           <a:xfrm>
-            <a:off x="8220456" y="5074920"/>
-            <a:ext cx="18288" cy="201168"/>
+            <a:off x="8220456" y="5243627"/>
+            <a:ext cx="18288" cy="211226"/>
           </a:xfrm>
           <a:prstGeom prst="rect">
             <a:avLst/>
@@ -4835,8 +4835,8 @@
         </p:nvSpPr>
         <p:spPr>
           <a:xfrm>
-            <a:off x="8860536" y="4992624"/>
-            <a:ext cx="1024128" cy="365760"/>
+            <a:off x="8860536" y="5157216"/>
+            <a:ext cx="1024128" cy="384048"/>
           </a:xfrm>
           <a:prstGeom prst="rect">
             <a:avLst/>
@@ -4874,8 +4874,8 @@
         </p:nvSpPr>
         <p:spPr>
           <a:xfrm>
-            <a:off x="9884664" y="4992624"/>
-            <a:ext cx="768096" cy="365760"/>
+            <a:off x="9884664" y="5157216"/>
+            <a:ext cx="768096" cy="384048"/>
           </a:xfrm>
           <a:prstGeom prst="rect">
             <a:avLst/>
@@ -4913,8 +4913,8 @@
         </p:nvSpPr>
         <p:spPr>
           <a:xfrm>
-            <a:off x="10652760" y="4992624"/>
-            <a:ext cx="768096" cy="365760"/>
+            <a:off x="10652760" y="5157216"/>
+            <a:ext cx="768096" cy="384048"/>
           </a:xfrm>
           <a:prstGeom prst="rect">
             <a:avLst/>
@@ -4952,8 +4952,8 @@
         </p:nvSpPr>
         <p:spPr>
           <a:xfrm>
-            <a:off x="457200" y="5961888"/>
-            <a:ext cx="11274552" cy="548640"/>
+            <a:off x="457200" y="6126480"/>
+            <a:ext cx="11274552" cy="615696"/>
           </a:xfrm>
           <a:prstGeom prst="rect">
             <a:avLst/>
@@ -4972,8 +4972,8 @@
         </p:nvSpPr>
         <p:spPr>
           <a:xfrm>
-            <a:off x="658368" y="5980176"/>
-            <a:ext cx="10927080" cy="512064"/>
+            <a:off x="658368" y="6144768"/>
+            <a:ext cx="10927080" cy="579120"/>
           </a:xfrm>
           <a:prstGeom prst="rect">
             <a:avLst/>

--- a/day2-deck/decks/Fixed Gross per Employee Gap - Review.pptx
+++ b/day2-deck/decks/Fixed Gross per Employee Gap - Review.pptx
@@ -1022,7 +1022,7 @@
         </p:nvSpPr>
         <p:spPr>
           <a:xfrm>
-            <a:off x="3310128" y="1316736"/>
+            <a:off x="3355848" y="1316736"/>
             <a:ext cx="1024128" cy="329184"/>
           </a:xfrm>
           <a:prstGeom prst="rect">
@@ -1061,7 +1061,7 @@
         </p:nvSpPr>
         <p:spPr>
           <a:xfrm>
-            <a:off x="4334256" y="1316736"/>
+            <a:off x="4379976" y="1316736"/>
             <a:ext cx="768096" cy="329184"/>
           </a:xfrm>
           <a:prstGeom prst="rect">
@@ -1100,7 +1100,7 @@
         </p:nvSpPr>
         <p:spPr>
           <a:xfrm>
-            <a:off x="5102352" y="1316736"/>
+            <a:off x="5148072" y="1316736"/>
             <a:ext cx="768096" cy="329184"/>
           </a:xfrm>
           <a:prstGeom prst="rect">
@@ -1139,7 +1139,7 @@
         </p:nvSpPr>
         <p:spPr>
           <a:xfrm>
-            <a:off x="8860536" y="1316736"/>
+            <a:off x="8906256" y="1316736"/>
             <a:ext cx="1024128" cy="329184"/>
           </a:xfrm>
           <a:prstGeom prst="rect">
@@ -1178,7 +1178,7 @@
         </p:nvSpPr>
         <p:spPr>
           <a:xfrm>
-            <a:off x="9884664" y="1316736"/>
+            <a:off x="9930384" y="1316736"/>
             <a:ext cx="768096" cy="329184"/>
           </a:xfrm>
           <a:prstGeom prst="rect">
@@ -1217,7 +1217,7 @@
         </p:nvSpPr>
         <p:spPr>
           <a:xfrm>
-            <a:off x="10652760" y="1316736"/>
+            <a:off x="10698480" y="1316736"/>
             <a:ext cx="768096" cy="329184"/>
           </a:xfrm>
           <a:prstGeom prst="rect">
@@ -1257,7 +1257,46 @@
         <p:spPr>
           <a:xfrm>
             <a:off x="658368" y="1700784"/>
-            <a:ext cx="1938528" cy="384048"/>
+            <a:ext cx="310896" cy="384048"/>
+          </a:xfrm>
+          <a:prstGeom prst="rect">
+            <a:avLst/>
+          </a:prstGeom>
+          <a:noFill/>
+          <a:ln/>
+        </p:spPr>
+        <p:txBody>
+          <a:bodyPr wrap="square" lIns="0" tIns="0" rIns="0" bIns="0" rtlCol="0" anchor="ctr"/>
+          <a:lstStyle/>
+          <a:p>
+            <a:pPr algn="r" indent="0" marL="0">
+              <a:buNone/>
+            </a:pPr>
+            <a:r>
+              <a:rPr lang="en-US" sz="1200" dirty="0">
+                <a:solidFill>
+                  <a:srgbClr val="9AA3AD"/>
+                </a:solidFill>
+                <a:latin typeface="Inter" pitchFamily="34" charset="0"/>
+                <a:ea typeface="Inter" pitchFamily="34" charset="-122"/>
+                <a:cs typeface="Inter" pitchFamily="34" charset="-120"/>
+              </a:rPr>
+              <a:t>1</a:t>
+            </a:r>
+            <a:endParaRPr lang="en-US" sz="1200" dirty="0"/>
+          </a:p>
+        </p:txBody>
+      </p:sp>
+      <p:sp>
+        <p:nvSpPr>
+          <p:cNvPr id="13" name="Text 11"/>
+          <p:cNvSpPr txBox="1"/>
+          <p:nvPr/>
+        </p:nvSpPr>
+        <p:spPr>
+          <a:xfrm>
+            <a:off x="1014984" y="1700784"/>
+            <a:ext cx="1783080" cy="384048"/>
           </a:xfrm>
           <a:prstGeom prst="rect">
             <a:avLst/>
@@ -1289,14 +1328,14 @@
       </p:sp>
       <p:sp>
         <p:nvSpPr>
-          <p:cNvPr id="13" name="Shape 11"/>
+          <p:cNvPr id="14" name="Shape 12"/>
           <p:cNvSpPr/>
           <p:nvPr/>
         </p:nvSpPr>
         <p:spPr>
           <a:xfrm>
-            <a:off x="2670048" y="1787195"/>
-            <a:ext cx="585216" cy="211226"/>
+            <a:off x="2871216" y="1787195"/>
+            <a:ext cx="429768" cy="211226"/>
           </a:xfrm>
           <a:prstGeom prst="rect">
             <a:avLst/>
@@ -1309,13 +1348,13 @@
       </p:sp>
       <p:sp>
         <p:nvSpPr>
-          <p:cNvPr id="14" name="Text 12"/>
-          <p:cNvSpPr txBox="1"/>
-          <p:nvPr/>
-        </p:nvSpPr>
-        <p:spPr>
-          <a:xfrm>
-            <a:off x="3310128" y="1700784"/>
+          <p:cNvPr id="15" name="Text 13"/>
+          <p:cNvSpPr txBox="1"/>
+          <p:nvPr/>
+        </p:nvSpPr>
+        <p:spPr>
+          <a:xfrm>
+            <a:off x="3355848" y="1700784"/>
             <a:ext cx="1024128" cy="384048"/>
           </a:xfrm>
           <a:prstGeom prst="rect">
@@ -1348,13 +1387,13 @@
       </p:sp>
       <p:sp>
         <p:nvSpPr>
-          <p:cNvPr id="15" name="Text 13"/>
-          <p:cNvSpPr txBox="1"/>
-          <p:nvPr/>
-        </p:nvSpPr>
-        <p:spPr>
-          <a:xfrm>
-            <a:off x="4334256" y="1700784"/>
+          <p:cNvPr id="16" name="Text 14"/>
+          <p:cNvSpPr txBox="1"/>
+          <p:nvPr/>
+        </p:nvSpPr>
+        <p:spPr>
+          <a:xfrm>
+            <a:off x="4379976" y="1700784"/>
             <a:ext cx="768096" cy="384048"/>
           </a:xfrm>
           <a:prstGeom prst="rect">
@@ -1387,13 +1426,13 @@
       </p:sp>
       <p:sp>
         <p:nvSpPr>
-          <p:cNvPr id="16" name="Text 14"/>
-          <p:cNvSpPr txBox="1"/>
-          <p:nvPr/>
-        </p:nvSpPr>
-        <p:spPr>
-          <a:xfrm>
-            <a:off x="5102352" y="1700784"/>
+          <p:cNvPr id="17" name="Text 15"/>
+          <p:cNvSpPr txBox="1"/>
+          <p:nvPr/>
+        </p:nvSpPr>
+        <p:spPr>
+          <a:xfrm>
+            <a:off x="5148072" y="1700784"/>
             <a:ext cx="768096" cy="384048"/>
           </a:xfrm>
           <a:prstGeom prst="rect">
@@ -1426,14 +1465,53 @@
       </p:sp>
       <p:sp>
         <p:nvSpPr>
-          <p:cNvPr id="17" name="Text 15"/>
+          <p:cNvPr id="18" name="Text 16"/>
           <p:cNvSpPr txBox="1"/>
           <p:nvPr/>
         </p:nvSpPr>
         <p:spPr>
           <a:xfrm>
             <a:off x="658368" y="2084832"/>
-            <a:ext cx="1938528" cy="384048"/>
+            <a:ext cx="310896" cy="384048"/>
+          </a:xfrm>
+          <a:prstGeom prst="rect">
+            <a:avLst/>
+          </a:prstGeom>
+          <a:noFill/>
+          <a:ln/>
+        </p:spPr>
+        <p:txBody>
+          <a:bodyPr wrap="square" lIns="0" tIns="0" rIns="0" bIns="0" rtlCol="0" anchor="ctr"/>
+          <a:lstStyle/>
+          <a:p>
+            <a:pPr algn="r" indent="0" marL="0">
+              <a:buNone/>
+            </a:pPr>
+            <a:r>
+              <a:rPr lang="en-US" sz="1200" dirty="0">
+                <a:solidFill>
+                  <a:srgbClr val="9AA3AD"/>
+                </a:solidFill>
+                <a:latin typeface="Inter" pitchFamily="34" charset="0"/>
+                <a:ea typeface="Inter" pitchFamily="34" charset="-122"/>
+                <a:cs typeface="Inter" pitchFamily="34" charset="-120"/>
+              </a:rPr>
+              <a:t>2</a:t>
+            </a:r>
+            <a:endParaRPr lang="en-US" sz="1200" dirty="0"/>
+          </a:p>
+        </p:txBody>
+      </p:sp>
+      <p:sp>
+        <p:nvSpPr>
+          <p:cNvPr id="19" name="Text 17"/>
+          <p:cNvSpPr txBox="1"/>
+          <p:nvPr/>
+        </p:nvSpPr>
+        <p:spPr>
+          <a:xfrm>
+            <a:off x="1014984" y="2084832"/>
+            <a:ext cx="1783080" cy="384048"/>
           </a:xfrm>
           <a:prstGeom prst="rect">
             <a:avLst/>
@@ -1465,14 +1543,14 @@
       </p:sp>
       <p:sp>
         <p:nvSpPr>
-          <p:cNvPr id="18" name="Shape 16"/>
+          <p:cNvPr id="20" name="Shape 18"/>
           <p:cNvSpPr/>
           <p:nvPr/>
         </p:nvSpPr>
         <p:spPr>
           <a:xfrm>
-            <a:off x="2670048" y="2171243"/>
-            <a:ext cx="521308" cy="211226"/>
+            <a:off x="2871216" y="2171243"/>
+            <a:ext cx="382835" cy="211226"/>
           </a:xfrm>
           <a:prstGeom prst="rect">
             <a:avLst/>
@@ -1485,13 +1563,13 @@
       </p:sp>
       <p:sp>
         <p:nvSpPr>
-          <p:cNvPr id="19" name="Text 17"/>
-          <p:cNvSpPr txBox="1"/>
-          <p:nvPr/>
-        </p:nvSpPr>
-        <p:spPr>
-          <a:xfrm>
-            <a:off x="3310128" y="2084832"/>
+          <p:cNvPr id="21" name="Text 19"/>
+          <p:cNvSpPr txBox="1"/>
+          <p:nvPr/>
+        </p:nvSpPr>
+        <p:spPr>
+          <a:xfrm>
+            <a:off x="3355848" y="2084832"/>
             <a:ext cx="1024128" cy="384048"/>
           </a:xfrm>
           <a:prstGeom prst="rect">
@@ -1524,13 +1602,13 @@
       </p:sp>
       <p:sp>
         <p:nvSpPr>
-          <p:cNvPr id="20" name="Text 18"/>
-          <p:cNvSpPr txBox="1"/>
-          <p:nvPr/>
-        </p:nvSpPr>
-        <p:spPr>
-          <a:xfrm>
-            <a:off x="4334256" y="2084832"/>
+          <p:cNvPr id="22" name="Text 20"/>
+          <p:cNvSpPr txBox="1"/>
+          <p:nvPr/>
+        </p:nvSpPr>
+        <p:spPr>
+          <a:xfrm>
+            <a:off x="4379976" y="2084832"/>
             <a:ext cx="768096" cy="384048"/>
           </a:xfrm>
           <a:prstGeom prst="rect">
@@ -1563,13 +1641,13 @@
       </p:sp>
       <p:sp>
         <p:nvSpPr>
-          <p:cNvPr id="21" name="Text 19"/>
-          <p:cNvSpPr txBox="1"/>
-          <p:nvPr/>
-        </p:nvSpPr>
-        <p:spPr>
-          <a:xfrm>
-            <a:off x="5102352" y="2084832"/>
+          <p:cNvPr id="23" name="Text 21"/>
+          <p:cNvSpPr txBox="1"/>
+          <p:nvPr/>
+        </p:nvSpPr>
+        <p:spPr>
+          <a:xfrm>
+            <a:off x="5148072" y="2084832"/>
             <a:ext cx="768096" cy="384048"/>
           </a:xfrm>
           <a:prstGeom prst="rect">
@@ -1602,14 +1680,53 @@
       </p:sp>
       <p:sp>
         <p:nvSpPr>
-          <p:cNvPr id="22" name="Text 20"/>
+          <p:cNvPr id="24" name="Text 22"/>
           <p:cNvSpPr txBox="1"/>
           <p:nvPr/>
         </p:nvSpPr>
         <p:spPr>
           <a:xfrm>
             <a:off x="658368" y="2468880"/>
-            <a:ext cx="1938528" cy="384048"/>
+            <a:ext cx="310896" cy="384048"/>
+          </a:xfrm>
+          <a:prstGeom prst="rect">
+            <a:avLst/>
+          </a:prstGeom>
+          <a:noFill/>
+          <a:ln/>
+        </p:spPr>
+        <p:txBody>
+          <a:bodyPr wrap="square" lIns="0" tIns="0" rIns="0" bIns="0" rtlCol="0" anchor="ctr"/>
+          <a:lstStyle/>
+          <a:p>
+            <a:pPr algn="r" indent="0" marL="0">
+              <a:buNone/>
+            </a:pPr>
+            <a:r>
+              <a:rPr lang="en-US" sz="1200" dirty="0">
+                <a:solidFill>
+                  <a:srgbClr val="9AA3AD"/>
+                </a:solidFill>
+                <a:latin typeface="Inter" pitchFamily="34" charset="0"/>
+                <a:ea typeface="Inter" pitchFamily="34" charset="-122"/>
+                <a:cs typeface="Inter" pitchFamily="34" charset="-120"/>
+              </a:rPr>
+              <a:t>3</a:t>
+            </a:r>
+            <a:endParaRPr lang="en-US" sz="1200" dirty="0"/>
+          </a:p>
+        </p:txBody>
+      </p:sp>
+      <p:sp>
+        <p:nvSpPr>
+          <p:cNvPr id="25" name="Text 23"/>
+          <p:cNvSpPr txBox="1"/>
+          <p:nvPr/>
+        </p:nvSpPr>
+        <p:spPr>
+          <a:xfrm>
+            <a:off x="1014984" y="2468880"/>
+            <a:ext cx="1783080" cy="384048"/>
           </a:xfrm>
           <a:prstGeom prst="rect">
             <a:avLst/>
@@ -1641,14 +1758,14 @@
       </p:sp>
       <p:sp>
         <p:nvSpPr>
-          <p:cNvPr id="23" name="Shape 21"/>
+          <p:cNvPr id="26" name="Shape 24"/>
           <p:cNvSpPr/>
           <p:nvPr/>
         </p:nvSpPr>
         <p:spPr>
           <a:xfrm>
-            <a:off x="2670048" y="2555291"/>
-            <a:ext cx="321685" cy="211226"/>
+            <a:off x="2871216" y="2555291"/>
+            <a:ext cx="236238" cy="211226"/>
           </a:xfrm>
           <a:prstGeom prst="rect">
             <a:avLst/>
@@ -1661,13 +1778,13 @@
       </p:sp>
       <p:sp>
         <p:nvSpPr>
-          <p:cNvPr id="24" name="Text 22"/>
-          <p:cNvSpPr txBox="1"/>
-          <p:nvPr/>
-        </p:nvSpPr>
-        <p:spPr>
-          <a:xfrm>
-            <a:off x="3310128" y="2468880"/>
+          <p:cNvPr id="27" name="Text 25"/>
+          <p:cNvSpPr txBox="1"/>
+          <p:nvPr/>
+        </p:nvSpPr>
+        <p:spPr>
+          <a:xfrm>
+            <a:off x="3355848" y="2468880"/>
             <a:ext cx="1024128" cy="384048"/>
           </a:xfrm>
           <a:prstGeom prst="rect">
@@ -1700,13 +1817,13 @@
       </p:sp>
       <p:sp>
         <p:nvSpPr>
-          <p:cNvPr id="25" name="Text 23"/>
-          <p:cNvSpPr txBox="1"/>
-          <p:nvPr/>
-        </p:nvSpPr>
-        <p:spPr>
-          <a:xfrm>
-            <a:off x="4334256" y="2468880"/>
+          <p:cNvPr id="28" name="Text 26"/>
+          <p:cNvSpPr txBox="1"/>
+          <p:nvPr/>
+        </p:nvSpPr>
+        <p:spPr>
+          <a:xfrm>
+            <a:off x="4379976" y="2468880"/>
             <a:ext cx="768096" cy="384048"/>
           </a:xfrm>
           <a:prstGeom prst="rect">
@@ -1739,13 +1856,13 @@
       </p:sp>
       <p:sp>
         <p:nvSpPr>
-          <p:cNvPr id="26" name="Text 24"/>
-          <p:cNvSpPr txBox="1"/>
-          <p:nvPr/>
-        </p:nvSpPr>
-        <p:spPr>
-          <a:xfrm>
-            <a:off x="5102352" y="2468880"/>
+          <p:cNvPr id="29" name="Text 27"/>
+          <p:cNvSpPr txBox="1"/>
+          <p:nvPr/>
+        </p:nvSpPr>
+        <p:spPr>
+          <a:xfrm>
+            <a:off x="5148072" y="2468880"/>
             <a:ext cx="768096" cy="384048"/>
           </a:xfrm>
           <a:prstGeom prst="rect">
@@ -1778,14 +1895,53 @@
       </p:sp>
       <p:sp>
         <p:nvSpPr>
-          <p:cNvPr id="27" name="Text 25"/>
+          <p:cNvPr id="30" name="Text 28"/>
           <p:cNvSpPr txBox="1"/>
           <p:nvPr/>
         </p:nvSpPr>
         <p:spPr>
           <a:xfrm>
             <a:off x="658368" y="2852928"/>
-            <a:ext cx="1938528" cy="384048"/>
+            <a:ext cx="310896" cy="384048"/>
+          </a:xfrm>
+          <a:prstGeom prst="rect">
+            <a:avLst/>
+          </a:prstGeom>
+          <a:noFill/>
+          <a:ln/>
+        </p:spPr>
+        <p:txBody>
+          <a:bodyPr wrap="square" lIns="0" tIns="0" rIns="0" bIns="0" rtlCol="0" anchor="ctr"/>
+          <a:lstStyle/>
+          <a:p>
+            <a:pPr algn="r" indent="0" marL="0">
+              <a:buNone/>
+            </a:pPr>
+            <a:r>
+              <a:rPr lang="en-US" sz="1200" dirty="0">
+                <a:solidFill>
+                  <a:srgbClr val="9AA3AD"/>
+                </a:solidFill>
+                <a:latin typeface="Inter" pitchFamily="34" charset="0"/>
+                <a:ea typeface="Inter" pitchFamily="34" charset="-122"/>
+                <a:cs typeface="Inter" pitchFamily="34" charset="-120"/>
+              </a:rPr>
+              <a:t>4</a:t>
+            </a:r>
+            <a:endParaRPr lang="en-US" sz="1200" dirty="0"/>
+          </a:p>
+        </p:txBody>
+      </p:sp>
+      <p:sp>
+        <p:nvSpPr>
+          <p:cNvPr id="31" name="Text 29"/>
+          <p:cNvSpPr txBox="1"/>
+          <p:nvPr/>
+        </p:nvSpPr>
+        <p:spPr>
+          <a:xfrm>
+            <a:off x="1014984" y="2852928"/>
+            <a:ext cx="1783080" cy="384048"/>
           </a:xfrm>
           <a:prstGeom prst="rect">
             <a:avLst/>
@@ -1817,14 +1973,14 @@
       </p:sp>
       <p:sp>
         <p:nvSpPr>
-          <p:cNvPr id="28" name="Shape 26"/>
+          <p:cNvPr id="32" name="Shape 30"/>
           <p:cNvSpPr/>
           <p:nvPr/>
         </p:nvSpPr>
         <p:spPr>
           <a:xfrm>
-            <a:off x="2670048" y="2939339"/>
-            <a:ext cx="313094" cy="211226"/>
+            <a:off x="2871216" y="2939339"/>
+            <a:ext cx="229928" cy="211226"/>
           </a:xfrm>
           <a:prstGeom prst="rect">
             <a:avLst/>
@@ -1837,13 +1993,13 @@
       </p:sp>
       <p:sp>
         <p:nvSpPr>
-          <p:cNvPr id="29" name="Text 27"/>
-          <p:cNvSpPr txBox="1"/>
-          <p:nvPr/>
-        </p:nvSpPr>
-        <p:spPr>
-          <a:xfrm>
-            <a:off x="3310128" y="2852928"/>
+          <p:cNvPr id="33" name="Text 31"/>
+          <p:cNvSpPr txBox="1"/>
+          <p:nvPr/>
+        </p:nvSpPr>
+        <p:spPr>
+          <a:xfrm>
+            <a:off x="3355848" y="2852928"/>
             <a:ext cx="1024128" cy="384048"/>
           </a:xfrm>
           <a:prstGeom prst="rect">
@@ -1876,13 +2032,13 @@
       </p:sp>
       <p:sp>
         <p:nvSpPr>
-          <p:cNvPr id="30" name="Text 28"/>
-          <p:cNvSpPr txBox="1"/>
-          <p:nvPr/>
-        </p:nvSpPr>
-        <p:spPr>
-          <a:xfrm>
-            <a:off x="4334256" y="2852928"/>
+          <p:cNvPr id="34" name="Text 32"/>
+          <p:cNvSpPr txBox="1"/>
+          <p:nvPr/>
+        </p:nvSpPr>
+        <p:spPr>
+          <a:xfrm>
+            <a:off x="4379976" y="2852928"/>
             <a:ext cx="768096" cy="384048"/>
           </a:xfrm>
           <a:prstGeom prst="rect">
@@ -1915,13 +2071,13 @@
       </p:sp>
       <p:sp>
         <p:nvSpPr>
-          <p:cNvPr id="31" name="Text 29"/>
-          <p:cNvSpPr txBox="1"/>
-          <p:nvPr/>
-        </p:nvSpPr>
-        <p:spPr>
-          <a:xfrm>
-            <a:off x="5102352" y="2852928"/>
+          <p:cNvPr id="35" name="Text 33"/>
+          <p:cNvSpPr txBox="1"/>
+          <p:nvPr/>
+        </p:nvSpPr>
+        <p:spPr>
+          <a:xfrm>
+            <a:off x="5148072" y="2852928"/>
             <a:ext cx="768096" cy="384048"/>
           </a:xfrm>
           <a:prstGeom prst="rect">
@@ -1954,14 +2110,53 @@
       </p:sp>
       <p:sp>
         <p:nvSpPr>
-          <p:cNvPr id="32" name="Text 30"/>
+          <p:cNvPr id="36" name="Text 34"/>
           <p:cNvSpPr txBox="1"/>
           <p:nvPr/>
         </p:nvSpPr>
         <p:spPr>
           <a:xfrm>
             <a:off x="658368" y="3236976"/>
-            <a:ext cx="1938528" cy="384048"/>
+            <a:ext cx="310896" cy="384048"/>
+          </a:xfrm>
+          <a:prstGeom prst="rect">
+            <a:avLst/>
+          </a:prstGeom>
+          <a:noFill/>
+          <a:ln/>
+        </p:spPr>
+        <p:txBody>
+          <a:bodyPr wrap="square" lIns="0" tIns="0" rIns="0" bIns="0" rtlCol="0" anchor="ctr"/>
+          <a:lstStyle/>
+          <a:p>
+            <a:pPr algn="r" indent="0" marL="0">
+              <a:buNone/>
+            </a:pPr>
+            <a:r>
+              <a:rPr lang="en-US" sz="1200" dirty="0">
+                <a:solidFill>
+                  <a:srgbClr val="9AA3AD"/>
+                </a:solidFill>
+                <a:latin typeface="Inter" pitchFamily="34" charset="0"/>
+                <a:ea typeface="Inter" pitchFamily="34" charset="-122"/>
+                <a:cs typeface="Inter" pitchFamily="34" charset="-120"/>
+              </a:rPr>
+              <a:t>5</a:t>
+            </a:r>
+            <a:endParaRPr lang="en-US" sz="1200" dirty="0"/>
+          </a:p>
+        </p:txBody>
+      </p:sp>
+      <p:sp>
+        <p:nvSpPr>
+          <p:cNvPr id="37" name="Text 35"/>
+          <p:cNvSpPr txBox="1"/>
+          <p:nvPr/>
+        </p:nvSpPr>
+        <p:spPr>
+          <a:xfrm>
+            <a:off x="1014984" y="3236976"/>
+            <a:ext cx="1783080" cy="384048"/>
           </a:xfrm>
           <a:prstGeom prst="rect">
             <a:avLst/>
@@ -1993,14 +2188,14 @@
       </p:sp>
       <p:sp>
         <p:nvSpPr>
-          <p:cNvPr id="33" name="Shape 31"/>
+          <p:cNvPr id="38" name="Shape 36"/>
           <p:cNvSpPr/>
           <p:nvPr/>
         </p:nvSpPr>
         <p:spPr>
           <a:xfrm>
-            <a:off x="2670048" y="3323387"/>
-            <a:ext cx="293540" cy="211226"/>
+            <a:off x="2871216" y="3323387"/>
+            <a:ext cx="215568" cy="211226"/>
           </a:xfrm>
           <a:prstGeom prst="rect">
             <a:avLst/>
@@ -2013,13 +2208,13 @@
       </p:sp>
       <p:sp>
         <p:nvSpPr>
-          <p:cNvPr id="34" name="Text 32"/>
-          <p:cNvSpPr txBox="1"/>
-          <p:nvPr/>
-        </p:nvSpPr>
-        <p:spPr>
-          <a:xfrm>
-            <a:off x="3310128" y="3236976"/>
+          <p:cNvPr id="39" name="Text 37"/>
+          <p:cNvSpPr txBox="1"/>
+          <p:nvPr/>
+        </p:nvSpPr>
+        <p:spPr>
+          <a:xfrm>
+            <a:off x="3355848" y="3236976"/>
             <a:ext cx="1024128" cy="384048"/>
           </a:xfrm>
           <a:prstGeom prst="rect">
@@ -2052,13 +2247,13 @@
       </p:sp>
       <p:sp>
         <p:nvSpPr>
-          <p:cNvPr id="35" name="Text 33"/>
-          <p:cNvSpPr txBox="1"/>
-          <p:nvPr/>
-        </p:nvSpPr>
-        <p:spPr>
-          <a:xfrm>
-            <a:off x="4334256" y="3236976"/>
+          <p:cNvPr id="40" name="Text 38"/>
+          <p:cNvSpPr txBox="1"/>
+          <p:nvPr/>
+        </p:nvSpPr>
+        <p:spPr>
+          <a:xfrm>
+            <a:off x="4379976" y="3236976"/>
             <a:ext cx="768096" cy="384048"/>
           </a:xfrm>
           <a:prstGeom prst="rect">
@@ -2091,13 +2286,13 @@
       </p:sp>
       <p:sp>
         <p:nvSpPr>
-          <p:cNvPr id="36" name="Text 34"/>
-          <p:cNvSpPr txBox="1"/>
-          <p:nvPr/>
-        </p:nvSpPr>
-        <p:spPr>
-          <a:xfrm>
-            <a:off x="5102352" y="3236976"/>
+          <p:cNvPr id="41" name="Text 39"/>
+          <p:cNvSpPr txBox="1"/>
+          <p:nvPr/>
+        </p:nvSpPr>
+        <p:spPr>
+          <a:xfrm>
+            <a:off x="5148072" y="3236976"/>
             <a:ext cx="768096" cy="384048"/>
           </a:xfrm>
           <a:prstGeom prst="rect">
@@ -2130,14 +2325,53 @@
       </p:sp>
       <p:sp>
         <p:nvSpPr>
-          <p:cNvPr id="37" name="Text 35"/>
+          <p:cNvPr id="42" name="Text 40"/>
           <p:cNvSpPr txBox="1"/>
           <p:nvPr/>
         </p:nvSpPr>
         <p:spPr>
           <a:xfrm>
             <a:off x="658368" y="3621024"/>
-            <a:ext cx="1938528" cy="384048"/>
+            <a:ext cx="310896" cy="384048"/>
+          </a:xfrm>
+          <a:prstGeom prst="rect">
+            <a:avLst/>
+          </a:prstGeom>
+          <a:noFill/>
+          <a:ln/>
+        </p:spPr>
+        <p:txBody>
+          <a:bodyPr wrap="square" lIns="0" tIns="0" rIns="0" bIns="0" rtlCol="0" anchor="ctr"/>
+          <a:lstStyle/>
+          <a:p>
+            <a:pPr algn="r" indent="0" marL="0">
+              <a:buNone/>
+            </a:pPr>
+            <a:r>
+              <a:rPr lang="en-US" sz="1200" dirty="0">
+                <a:solidFill>
+                  <a:srgbClr val="9AA3AD"/>
+                </a:solidFill>
+                <a:latin typeface="Inter" pitchFamily="34" charset="0"/>
+                <a:ea typeface="Inter" pitchFamily="34" charset="-122"/>
+                <a:cs typeface="Inter" pitchFamily="34" charset="-120"/>
+              </a:rPr>
+              <a:t>6</a:t>
+            </a:r>
+            <a:endParaRPr lang="en-US" sz="1200" dirty="0"/>
+          </a:p>
+        </p:txBody>
+      </p:sp>
+      <p:sp>
+        <p:nvSpPr>
+          <p:cNvPr id="43" name="Text 41"/>
+          <p:cNvSpPr txBox="1"/>
+          <p:nvPr/>
+        </p:nvSpPr>
+        <p:spPr>
+          <a:xfrm>
+            <a:off x="1014984" y="3621024"/>
+            <a:ext cx="1783080" cy="384048"/>
           </a:xfrm>
           <a:prstGeom prst="rect">
             <a:avLst/>
@@ -2169,14 +2403,14 @@
       </p:sp>
       <p:sp>
         <p:nvSpPr>
-          <p:cNvPr id="38" name="Shape 36"/>
+          <p:cNvPr id="44" name="Shape 42"/>
           <p:cNvSpPr/>
           <p:nvPr/>
         </p:nvSpPr>
         <p:spPr>
           <a:xfrm>
-            <a:off x="2670048" y="3707435"/>
-            <a:ext cx="268472" cy="211226"/>
+            <a:off x="2871216" y="3707435"/>
+            <a:ext cx="197159" cy="211226"/>
           </a:xfrm>
           <a:prstGeom prst="rect">
             <a:avLst/>
@@ -2189,13 +2423,13 @@
       </p:sp>
       <p:sp>
         <p:nvSpPr>
-          <p:cNvPr id="39" name="Text 37"/>
-          <p:cNvSpPr txBox="1"/>
-          <p:nvPr/>
-        </p:nvSpPr>
-        <p:spPr>
-          <a:xfrm>
-            <a:off x="3310128" y="3621024"/>
+          <p:cNvPr id="45" name="Text 43"/>
+          <p:cNvSpPr txBox="1"/>
+          <p:nvPr/>
+        </p:nvSpPr>
+        <p:spPr>
+          <a:xfrm>
+            <a:off x="3355848" y="3621024"/>
             <a:ext cx="1024128" cy="384048"/>
           </a:xfrm>
           <a:prstGeom prst="rect">
@@ -2228,13 +2462,13 @@
       </p:sp>
       <p:sp>
         <p:nvSpPr>
-          <p:cNvPr id="40" name="Text 38"/>
-          <p:cNvSpPr txBox="1"/>
-          <p:nvPr/>
-        </p:nvSpPr>
-        <p:spPr>
-          <a:xfrm>
-            <a:off x="4334256" y="3621024"/>
+          <p:cNvPr id="46" name="Text 44"/>
+          <p:cNvSpPr txBox="1"/>
+          <p:nvPr/>
+        </p:nvSpPr>
+        <p:spPr>
+          <a:xfrm>
+            <a:off x="4379976" y="3621024"/>
             <a:ext cx="768096" cy="384048"/>
           </a:xfrm>
           <a:prstGeom prst="rect">
@@ -2267,13 +2501,13 @@
       </p:sp>
       <p:sp>
         <p:nvSpPr>
-          <p:cNvPr id="41" name="Text 39"/>
-          <p:cNvSpPr txBox="1"/>
-          <p:nvPr/>
-        </p:nvSpPr>
-        <p:spPr>
-          <a:xfrm>
-            <a:off x="5102352" y="3621024"/>
+          <p:cNvPr id="47" name="Text 45"/>
+          <p:cNvSpPr txBox="1"/>
+          <p:nvPr/>
+        </p:nvSpPr>
+        <p:spPr>
+          <a:xfrm>
+            <a:off x="5148072" y="3621024"/>
             <a:ext cx="768096" cy="384048"/>
           </a:xfrm>
           <a:prstGeom prst="rect">
@@ -2306,14 +2540,53 @@
       </p:sp>
       <p:sp>
         <p:nvSpPr>
-          <p:cNvPr id="42" name="Text 40"/>
+          <p:cNvPr id="48" name="Text 46"/>
           <p:cNvSpPr txBox="1"/>
           <p:nvPr/>
         </p:nvSpPr>
         <p:spPr>
           <a:xfrm>
             <a:off x="658368" y="4005072"/>
-            <a:ext cx="1938528" cy="384048"/>
+            <a:ext cx="310896" cy="384048"/>
+          </a:xfrm>
+          <a:prstGeom prst="rect">
+            <a:avLst/>
+          </a:prstGeom>
+          <a:noFill/>
+          <a:ln/>
+        </p:spPr>
+        <p:txBody>
+          <a:bodyPr wrap="square" lIns="0" tIns="0" rIns="0" bIns="0" rtlCol="0" anchor="ctr"/>
+          <a:lstStyle/>
+          <a:p>
+            <a:pPr algn="r" indent="0" marL="0">
+              <a:buNone/>
+            </a:pPr>
+            <a:r>
+              <a:rPr lang="en-US" sz="1200" dirty="0">
+                <a:solidFill>
+                  <a:srgbClr val="9AA3AD"/>
+                </a:solidFill>
+                <a:latin typeface="Inter" pitchFamily="34" charset="0"/>
+                <a:ea typeface="Inter" pitchFamily="34" charset="-122"/>
+                <a:cs typeface="Inter" pitchFamily="34" charset="-120"/>
+              </a:rPr>
+              <a:t>7</a:t>
+            </a:r>
+            <a:endParaRPr lang="en-US" sz="1200" dirty="0"/>
+          </a:p>
+        </p:txBody>
+      </p:sp>
+      <p:sp>
+        <p:nvSpPr>
+          <p:cNvPr id="49" name="Text 47"/>
+          <p:cNvSpPr txBox="1"/>
+          <p:nvPr/>
+        </p:nvSpPr>
+        <p:spPr>
+          <a:xfrm>
+            <a:off x="1014984" y="4005072"/>
+            <a:ext cx="1783080" cy="384048"/>
           </a:xfrm>
           <a:prstGeom prst="rect">
             <a:avLst/>
@@ -2345,14 +2618,14 @@
       </p:sp>
       <p:sp>
         <p:nvSpPr>
-          <p:cNvPr id="43" name="Shape 41"/>
+          <p:cNvPr id="50" name="Shape 48"/>
           <p:cNvSpPr/>
           <p:nvPr/>
         </p:nvSpPr>
         <p:spPr>
           <a:xfrm>
-            <a:off x="2670048" y="4091483"/>
-            <a:ext cx="252516" cy="211226"/>
+            <a:off x="2871216" y="4091483"/>
+            <a:ext cx="185442" cy="211226"/>
           </a:xfrm>
           <a:prstGeom prst="rect">
             <a:avLst/>
@@ -2365,13 +2638,13 @@
       </p:sp>
       <p:sp>
         <p:nvSpPr>
-          <p:cNvPr id="44" name="Text 42"/>
-          <p:cNvSpPr txBox="1"/>
-          <p:nvPr/>
-        </p:nvSpPr>
-        <p:spPr>
-          <a:xfrm>
-            <a:off x="3310128" y="4005072"/>
+          <p:cNvPr id="51" name="Text 49"/>
+          <p:cNvSpPr txBox="1"/>
+          <p:nvPr/>
+        </p:nvSpPr>
+        <p:spPr>
+          <a:xfrm>
+            <a:off x="3355848" y="4005072"/>
             <a:ext cx="1024128" cy="384048"/>
           </a:xfrm>
           <a:prstGeom prst="rect">
@@ -2404,13 +2677,13 @@
       </p:sp>
       <p:sp>
         <p:nvSpPr>
-          <p:cNvPr id="45" name="Text 43"/>
-          <p:cNvSpPr txBox="1"/>
-          <p:nvPr/>
-        </p:nvSpPr>
-        <p:spPr>
-          <a:xfrm>
-            <a:off x="4334256" y="4005072"/>
+          <p:cNvPr id="52" name="Text 50"/>
+          <p:cNvSpPr txBox="1"/>
+          <p:nvPr/>
+        </p:nvSpPr>
+        <p:spPr>
+          <a:xfrm>
+            <a:off x="4379976" y="4005072"/>
             <a:ext cx="768096" cy="384048"/>
           </a:xfrm>
           <a:prstGeom prst="rect">
@@ -2443,13 +2716,13 @@
       </p:sp>
       <p:sp>
         <p:nvSpPr>
-          <p:cNvPr id="46" name="Text 44"/>
-          <p:cNvSpPr txBox="1"/>
-          <p:nvPr/>
-        </p:nvSpPr>
-        <p:spPr>
-          <a:xfrm>
-            <a:off x="5102352" y="4005072"/>
+          <p:cNvPr id="53" name="Text 51"/>
+          <p:cNvSpPr txBox="1"/>
+          <p:nvPr/>
+        </p:nvSpPr>
+        <p:spPr>
+          <a:xfrm>
+            <a:off x="5148072" y="4005072"/>
             <a:ext cx="768096" cy="384048"/>
           </a:xfrm>
           <a:prstGeom prst="rect">
@@ -2482,14 +2755,53 @@
       </p:sp>
       <p:sp>
         <p:nvSpPr>
-          <p:cNvPr id="47" name="Text 45"/>
+          <p:cNvPr id="54" name="Text 52"/>
           <p:cNvSpPr txBox="1"/>
           <p:nvPr/>
         </p:nvSpPr>
         <p:spPr>
           <a:xfrm>
             <a:off x="658368" y="4389120"/>
-            <a:ext cx="1938528" cy="384048"/>
+            <a:ext cx="310896" cy="384048"/>
+          </a:xfrm>
+          <a:prstGeom prst="rect">
+            <a:avLst/>
+          </a:prstGeom>
+          <a:noFill/>
+          <a:ln/>
+        </p:spPr>
+        <p:txBody>
+          <a:bodyPr wrap="square" lIns="0" tIns="0" rIns="0" bIns="0" rtlCol="0" anchor="ctr"/>
+          <a:lstStyle/>
+          <a:p>
+            <a:pPr algn="r" indent="0" marL="0">
+              <a:buNone/>
+            </a:pPr>
+            <a:r>
+              <a:rPr lang="en-US" sz="1200" dirty="0">
+                <a:solidFill>
+                  <a:srgbClr val="9AA3AD"/>
+                </a:solidFill>
+                <a:latin typeface="Inter" pitchFamily="34" charset="0"/>
+                <a:ea typeface="Inter" pitchFamily="34" charset="-122"/>
+                <a:cs typeface="Inter" pitchFamily="34" charset="-120"/>
+              </a:rPr>
+              <a:t>8</a:t>
+            </a:r>
+            <a:endParaRPr lang="en-US" sz="1200" dirty="0"/>
+          </a:p>
+        </p:txBody>
+      </p:sp>
+      <p:sp>
+        <p:nvSpPr>
+          <p:cNvPr id="55" name="Text 53"/>
+          <p:cNvSpPr txBox="1"/>
+          <p:nvPr/>
+        </p:nvSpPr>
+        <p:spPr>
+          <a:xfrm>
+            <a:off x="1014984" y="4389120"/>
+            <a:ext cx="1783080" cy="384048"/>
           </a:xfrm>
           <a:prstGeom prst="rect">
             <a:avLst/>
@@ -2521,14 +2833,14 @@
       </p:sp>
       <p:sp>
         <p:nvSpPr>
-          <p:cNvPr id="48" name="Shape 46"/>
+          <p:cNvPr id="56" name="Shape 54"/>
           <p:cNvSpPr/>
           <p:nvPr/>
         </p:nvSpPr>
         <p:spPr>
           <a:xfrm>
-            <a:off x="2670048" y="4475531"/>
-            <a:ext cx="244133" cy="211226"/>
+            <a:off x="2871216" y="4475531"/>
+            <a:ext cx="179286" cy="211226"/>
           </a:xfrm>
           <a:prstGeom prst="rect">
             <a:avLst/>
@@ -2541,13 +2853,13 @@
       </p:sp>
       <p:sp>
         <p:nvSpPr>
-          <p:cNvPr id="49" name="Text 47"/>
-          <p:cNvSpPr txBox="1"/>
-          <p:nvPr/>
-        </p:nvSpPr>
-        <p:spPr>
-          <a:xfrm>
-            <a:off x="3310128" y="4389120"/>
+          <p:cNvPr id="57" name="Text 55"/>
+          <p:cNvSpPr txBox="1"/>
+          <p:nvPr/>
+        </p:nvSpPr>
+        <p:spPr>
+          <a:xfrm>
+            <a:off x="3355848" y="4389120"/>
             <a:ext cx="1024128" cy="384048"/>
           </a:xfrm>
           <a:prstGeom prst="rect">
@@ -2580,13 +2892,13 @@
       </p:sp>
       <p:sp>
         <p:nvSpPr>
-          <p:cNvPr id="50" name="Text 48"/>
-          <p:cNvSpPr txBox="1"/>
-          <p:nvPr/>
-        </p:nvSpPr>
-        <p:spPr>
-          <a:xfrm>
-            <a:off x="4334256" y="4389120"/>
+          <p:cNvPr id="58" name="Text 56"/>
+          <p:cNvSpPr txBox="1"/>
+          <p:nvPr/>
+        </p:nvSpPr>
+        <p:spPr>
+          <a:xfrm>
+            <a:off x="4379976" y="4389120"/>
             <a:ext cx="768096" cy="384048"/>
           </a:xfrm>
           <a:prstGeom prst="rect">
@@ -2619,13 +2931,13 @@
       </p:sp>
       <p:sp>
         <p:nvSpPr>
-          <p:cNvPr id="51" name="Text 49"/>
-          <p:cNvSpPr txBox="1"/>
-          <p:nvPr/>
-        </p:nvSpPr>
-        <p:spPr>
-          <a:xfrm>
-            <a:off x="5102352" y="4389120"/>
+          <p:cNvPr id="59" name="Text 57"/>
+          <p:cNvSpPr txBox="1"/>
+          <p:nvPr/>
+        </p:nvSpPr>
+        <p:spPr>
+          <a:xfrm>
+            <a:off x="5148072" y="4389120"/>
             <a:ext cx="768096" cy="384048"/>
           </a:xfrm>
           <a:prstGeom prst="rect">
@@ -2658,14 +2970,53 @@
       </p:sp>
       <p:sp>
         <p:nvSpPr>
-          <p:cNvPr id="52" name="Text 50"/>
+          <p:cNvPr id="60" name="Text 58"/>
           <p:cNvSpPr txBox="1"/>
           <p:nvPr/>
         </p:nvSpPr>
         <p:spPr>
           <a:xfrm>
             <a:off x="658368" y="4773168"/>
-            <a:ext cx="1938528" cy="384048"/>
+            <a:ext cx="310896" cy="384048"/>
+          </a:xfrm>
+          <a:prstGeom prst="rect">
+            <a:avLst/>
+          </a:prstGeom>
+          <a:noFill/>
+          <a:ln/>
+        </p:spPr>
+        <p:txBody>
+          <a:bodyPr wrap="square" lIns="0" tIns="0" rIns="0" bIns="0" rtlCol="0" anchor="ctr"/>
+          <a:lstStyle/>
+          <a:p>
+            <a:pPr algn="r" indent="0" marL="0">
+              <a:buNone/>
+            </a:pPr>
+            <a:r>
+              <a:rPr lang="en-US" sz="1200" dirty="0">
+                <a:solidFill>
+                  <a:srgbClr val="9AA3AD"/>
+                </a:solidFill>
+                <a:latin typeface="Inter" pitchFamily="34" charset="0"/>
+                <a:ea typeface="Inter" pitchFamily="34" charset="-122"/>
+                <a:cs typeface="Inter" pitchFamily="34" charset="-120"/>
+              </a:rPr>
+              <a:t>9</a:t>
+            </a:r>
+            <a:endParaRPr lang="en-US" sz="1200" dirty="0"/>
+          </a:p>
+        </p:txBody>
+      </p:sp>
+      <p:sp>
+        <p:nvSpPr>
+          <p:cNvPr id="61" name="Text 59"/>
+          <p:cNvSpPr txBox="1"/>
+          <p:nvPr/>
+        </p:nvSpPr>
+        <p:spPr>
+          <a:xfrm>
+            <a:off x="1014984" y="4773168"/>
+            <a:ext cx="1783080" cy="384048"/>
           </a:xfrm>
           <a:prstGeom prst="rect">
             <a:avLst/>
@@ -2697,14 +3048,14 @@
       </p:sp>
       <p:sp>
         <p:nvSpPr>
-          <p:cNvPr id="53" name="Shape 51"/>
+          <p:cNvPr id="62" name="Shape 60"/>
           <p:cNvSpPr/>
           <p:nvPr/>
         </p:nvSpPr>
         <p:spPr>
           <a:xfrm>
-            <a:off x="2670048" y="4859579"/>
-            <a:ext cx="243998" cy="211226"/>
+            <a:off x="2871216" y="4859579"/>
+            <a:ext cx="179186" cy="211226"/>
           </a:xfrm>
           <a:prstGeom prst="rect">
             <a:avLst/>
@@ -2717,13 +3068,13 @@
       </p:sp>
       <p:sp>
         <p:nvSpPr>
-          <p:cNvPr id="54" name="Text 52"/>
-          <p:cNvSpPr txBox="1"/>
-          <p:nvPr/>
-        </p:nvSpPr>
-        <p:spPr>
-          <a:xfrm>
-            <a:off x="3310128" y="4773168"/>
+          <p:cNvPr id="63" name="Text 61"/>
+          <p:cNvSpPr txBox="1"/>
+          <p:nvPr/>
+        </p:nvSpPr>
+        <p:spPr>
+          <a:xfrm>
+            <a:off x="3355848" y="4773168"/>
             <a:ext cx="1024128" cy="384048"/>
           </a:xfrm>
           <a:prstGeom prst="rect">
@@ -2756,13 +3107,13 @@
       </p:sp>
       <p:sp>
         <p:nvSpPr>
-          <p:cNvPr id="55" name="Text 53"/>
-          <p:cNvSpPr txBox="1"/>
-          <p:nvPr/>
-        </p:nvSpPr>
-        <p:spPr>
-          <a:xfrm>
-            <a:off x="4334256" y="4773168"/>
+          <p:cNvPr id="64" name="Text 62"/>
+          <p:cNvSpPr txBox="1"/>
+          <p:nvPr/>
+        </p:nvSpPr>
+        <p:spPr>
+          <a:xfrm>
+            <a:off x="4379976" y="4773168"/>
             <a:ext cx="768096" cy="384048"/>
           </a:xfrm>
           <a:prstGeom prst="rect">
@@ -2795,13 +3146,13 @@
       </p:sp>
       <p:sp>
         <p:nvSpPr>
-          <p:cNvPr id="56" name="Text 54"/>
-          <p:cNvSpPr txBox="1"/>
-          <p:nvPr/>
-        </p:nvSpPr>
-        <p:spPr>
-          <a:xfrm>
-            <a:off x="5102352" y="4773168"/>
+          <p:cNvPr id="65" name="Text 63"/>
+          <p:cNvSpPr txBox="1"/>
+          <p:nvPr/>
+        </p:nvSpPr>
+        <p:spPr>
+          <a:xfrm>
+            <a:off x="5148072" y="4773168"/>
             <a:ext cx="768096" cy="384048"/>
           </a:xfrm>
           <a:prstGeom prst="rect">
@@ -2834,14 +3185,53 @@
       </p:sp>
       <p:sp>
         <p:nvSpPr>
-          <p:cNvPr id="57" name="Text 55"/>
+          <p:cNvPr id="66" name="Text 64"/>
           <p:cNvSpPr txBox="1"/>
           <p:nvPr/>
         </p:nvSpPr>
         <p:spPr>
           <a:xfrm>
             <a:off x="658368" y="5157216"/>
-            <a:ext cx="1938528" cy="384048"/>
+            <a:ext cx="310896" cy="384048"/>
+          </a:xfrm>
+          <a:prstGeom prst="rect">
+            <a:avLst/>
+          </a:prstGeom>
+          <a:noFill/>
+          <a:ln/>
+        </p:spPr>
+        <p:txBody>
+          <a:bodyPr wrap="square" lIns="0" tIns="0" rIns="0" bIns="0" rtlCol="0" anchor="ctr"/>
+          <a:lstStyle/>
+          <a:p>
+            <a:pPr algn="r" indent="0" marL="0">
+              <a:buNone/>
+            </a:pPr>
+            <a:r>
+              <a:rPr lang="en-US" sz="1200" dirty="0">
+                <a:solidFill>
+                  <a:srgbClr val="9AA3AD"/>
+                </a:solidFill>
+                <a:latin typeface="Inter" pitchFamily="34" charset="0"/>
+                <a:ea typeface="Inter" pitchFamily="34" charset="-122"/>
+                <a:cs typeface="Inter" pitchFamily="34" charset="-120"/>
+              </a:rPr>
+              <a:t>10</a:t>
+            </a:r>
+            <a:endParaRPr lang="en-US" sz="1200" dirty="0"/>
+          </a:p>
+        </p:txBody>
+      </p:sp>
+      <p:sp>
+        <p:nvSpPr>
+          <p:cNvPr id="67" name="Text 65"/>
+          <p:cNvSpPr txBox="1"/>
+          <p:nvPr/>
+        </p:nvSpPr>
+        <p:spPr>
+          <a:xfrm>
+            <a:off x="1014984" y="5157216"/>
+            <a:ext cx="1783080" cy="384048"/>
           </a:xfrm>
           <a:prstGeom prst="rect">
             <a:avLst/>
@@ -2873,14 +3263,14 @@
       </p:sp>
       <p:sp>
         <p:nvSpPr>
-          <p:cNvPr id="58" name="Shape 56"/>
+          <p:cNvPr id="68" name="Shape 66"/>
           <p:cNvSpPr/>
           <p:nvPr/>
         </p:nvSpPr>
         <p:spPr>
           <a:xfrm>
-            <a:off x="2670048" y="5243627"/>
-            <a:ext cx="197721" cy="211226"/>
+            <a:off x="2871216" y="5243627"/>
+            <a:ext cx="145201" cy="211226"/>
           </a:xfrm>
           <a:prstGeom prst="rect">
             <a:avLst/>
@@ -2893,13 +3283,13 @@
       </p:sp>
       <p:sp>
         <p:nvSpPr>
-          <p:cNvPr id="59" name="Text 57"/>
-          <p:cNvSpPr txBox="1"/>
-          <p:nvPr/>
-        </p:nvSpPr>
-        <p:spPr>
-          <a:xfrm>
-            <a:off x="3310128" y="5157216"/>
+          <p:cNvPr id="69" name="Text 67"/>
+          <p:cNvSpPr txBox="1"/>
+          <p:nvPr/>
+        </p:nvSpPr>
+        <p:spPr>
+          <a:xfrm>
+            <a:off x="3355848" y="5157216"/>
             <a:ext cx="1024128" cy="384048"/>
           </a:xfrm>
           <a:prstGeom prst="rect">
@@ -2932,13 +3322,13 @@
       </p:sp>
       <p:sp>
         <p:nvSpPr>
-          <p:cNvPr id="60" name="Text 58"/>
-          <p:cNvSpPr txBox="1"/>
-          <p:nvPr/>
-        </p:nvSpPr>
-        <p:spPr>
-          <a:xfrm>
-            <a:off x="4334256" y="5157216"/>
+          <p:cNvPr id="70" name="Text 68"/>
+          <p:cNvSpPr txBox="1"/>
+          <p:nvPr/>
+        </p:nvSpPr>
+        <p:spPr>
+          <a:xfrm>
+            <a:off x="4379976" y="5157216"/>
             <a:ext cx="768096" cy="384048"/>
           </a:xfrm>
           <a:prstGeom prst="rect">
@@ -2971,13 +3361,13 @@
       </p:sp>
       <p:sp>
         <p:nvSpPr>
-          <p:cNvPr id="61" name="Text 59"/>
-          <p:cNvSpPr txBox="1"/>
-          <p:nvPr/>
-        </p:nvSpPr>
-        <p:spPr>
-          <a:xfrm>
-            <a:off x="5102352" y="5157216"/>
+          <p:cNvPr id="71" name="Text 69"/>
+          <p:cNvSpPr txBox="1"/>
+          <p:nvPr/>
+        </p:nvSpPr>
+        <p:spPr>
+          <a:xfrm>
+            <a:off x="5148072" y="5157216"/>
             <a:ext cx="768096" cy="384048"/>
           </a:xfrm>
           <a:prstGeom prst="rect">
@@ -3010,14 +3400,53 @@
       </p:sp>
       <p:sp>
         <p:nvSpPr>
-          <p:cNvPr id="62" name="Text 60"/>
+          <p:cNvPr id="72" name="Text 70"/>
           <p:cNvSpPr txBox="1"/>
           <p:nvPr/>
         </p:nvSpPr>
         <p:spPr>
           <a:xfrm>
             <a:off x="658368" y="5541264"/>
-            <a:ext cx="1938528" cy="384048"/>
+            <a:ext cx="310896" cy="384048"/>
+          </a:xfrm>
+          <a:prstGeom prst="rect">
+            <a:avLst/>
+          </a:prstGeom>
+          <a:noFill/>
+          <a:ln/>
+        </p:spPr>
+        <p:txBody>
+          <a:bodyPr wrap="square" lIns="0" tIns="0" rIns="0" bIns="0" rtlCol="0" anchor="ctr"/>
+          <a:lstStyle/>
+          <a:p>
+            <a:pPr algn="r" indent="0" marL="0">
+              <a:buNone/>
+            </a:pPr>
+            <a:r>
+              <a:rPr lang="en-US" sz="1200" dirty="0">
+                <a:solidFill>
+                  <a:srgbClr val="9AA3AD"/>
+                </a:solidFill>
+                <a:latin typeface="Inter" pitchFamily="34" charset="0"/>
+                <a:ea typeface="Inter" pitchFamily="34" charset="-122"/>
+                <a:cs typeface="Inter" pitchFamily="34" charset="-120"/>
+              </a:rPr>
+              <a:t>11</a:t>
+            </a:r>
+            <a:endParaRPr lang="en-US" sz="1200" dirty="0"/>
+          </a:p>
+        </p:txBody>
+      </p:sp>
+      <p:sp>
+        <p:nvSpPr>
+          <p:cNvPr id="73" name="Text 71"/>
+          <p:cNvSpPr txBox="1"/>
+          <p:nvPr/>
+        </p:nvSpPr>
+        <p:spPr>
+          <a:xfrm>
+            <a:off x="1014984" y="5541264"/>
+            <a:ext cx="1783080" cy="384048"/>
           </a:xfrm>
           <a:prstGeom prst="rect">
             <a:avLst/>
@@ -3049,14 +3478,14 @@
       </p:sp>
       <p:sp>
         <p:nvSpPr>
-          <p:cNvPr id="63" name="Shape 61"/>
+          <p:cNvPr id="74" name="Shape 72"/>
           <p:cNvSpPr/>
           <p:nvPr/>
         </p:nvSpPr>
         <p:spPr>
           <a:xfrm>
-            <a:off x="2670048" y="5627675"/>
-            <a:ext cx="197008" cy="211226"/>
+            <a:off x="2871216" y="5627675"/>
+            <a:ext cx="144678" cy="211226"/>
           </a:xfrm>
           <a:prstGeom prst="rect">
             <a:avLst/>
@@ -3069,13 +3498,13 @@
       </p:sp>
       <p:sp>
         <p:nvSpPr>
-          <p:cNvPr id="64" name="Text 62"/>
-          <p:cNvSpPr txBox="1"/>
-          <p:nvPr/>
-        </p:nvSpPr>
-        <p:spPr>
-          <a:xfrm>
-            <a:off x="3310128" y="5541264"/>
+          <p:cNvPr id="75" name="Text 73"/>
+          <p:cNvSpPr txBox="1"/>
+          <p:nvPr/>
+        </p:nvSpPr>
+        <p:spPr>
+          <a:xfrm>
+            <a:off x="3355848" y="5541264"/>
             <a:ext cx="1024128" cy="384048"/>
           </a:xfrm>
           <a:prstGeom prst="rect">
@@ -3108,13 +3537,13 @@
       </p:sp>
       <p:sp>
         <p:nvSpPr>
-          <p:cNvPr id="65" name="Text 63"/>
-          <p:cNvSpPr txBox="1"/>
-          <p:nvPr/>
-        </p:nvSpPr>
-        <p:spPr>
-          <a:xfrm>
-            <a:off x="4334256" y="5541264"/>
+          <p:cNvPr id="76" name="Text 74"/>
+          <p:cNvSpPr txBox="1"/>
+          <p:nvPr/>
+        </p:nvSpPr>
+        <p:spPr>
+          <a:xfrm>
+            <a:off x="4379976" y="5541264"/>
             <a:ext cx="768096" cy="384048"/>
           </a:xfrm>
           <a:prstGeom prst="rect">
@@ -3147,13 +3576,13 @@
       </p:sp>
       <p:sp>
         <p:nvSpPr>
-          <p:cNvPr id="66" name="Text 64"/>
-          <p:cNvSpPr txBox="1"/>
-          <p:nvPr/>
-        </p:nvSpPr>
-        <p:spPr>
-          <a:xfrm>
-            <a:off x="5102352" y="5541264"/>
+          <p:cNvPr id="77" name="Text 75"/>
+          <p:cNvSpPr txBox="1"/>
+          <p:nvPr/>
+        </p:nvSpPr>
+        <p:spPr>
+          <a:xfrm>
+            <a:off x="5148072" y="5541264"/>
             <a:ext cx="768096" cy="384048"/>
           </a:xfrm>
           <a:prstGeom prst="rect">
@@ -3186,14 +3615,53 @@
       </p:sp>
       <p:sp>
         <p:nvSpPr>
-          <p:cNvPr id="67" name="Text 65"/>
+          <p:cNvPr id="78" name="Text 76"/>
           <p:cNvSpPr txBox="1"/>
           <p:nvPr/>
         </p:nvSpPr>
         <p:spPr>
           <a:xfrm>
             <a:off x="6208776" y="1700784"/>
-            <a:ext cx="1938528" cy="384048"/>
+            <a:ext cx="310896" cy="384048"/>
+          </a:xfrm>
+          <a:prstGeom prst="rect">
+            <a:avLst/>
+          </a:prstGeom>
+          <a:noFill/>
+          <a:ln/>
+        </p:spPr>
+        <p:txBody>
+          <a:bodyPr wrap="square" lIns="0" tIns="0" rIns="0" bIns="0" rtlCol="0" anchor="ctr"/>
+          <a:lstStyle/>
+          <a:p>
+            <a:pPr algn="r" indent="0" marL="0">
+              <a:buNone/>
+            </a:pPr>
+            <a:r>
+              <a:rPr lang="en-US" sz="1200" dirty="0">
+                <a:solidFill>
+                  <a:srgbClr val="9AA3AD"/>
+                </a:solidFill>
+                <a:latin typeface="Inter" pitchFamily="34" charset="0"/>
+                <a:ea typeface="Inter" pitchFamily="34" charset="-122"/>
+                <a:cs typeface="Inter" pitchFamily="34" charset="-120"/>
+              </a:rPr>
+              <a:t>12</a:t>
+            </a:r>
+            <a:endParaRPr lang="en-US" sz="1200" dirty="0"/>
+          </a:p>
+        </p:txBody>
+      </p:sp>
+      <p:sp>
+        <p:nvSpPr>
+          <p:cNvPr id="79" name="Text 77"/>
+          <p:cNvSpPr txBox="1"/>
+          <p:nvPr/>
+        </p:nvSpPr>
+        <p:spPr>
+          <a:xfrm>
+            <a:off x="6565392" y="1700784"/>
+            <a:ext cx="1783080" cy="384048"/>
           </a:xfrm>
           <a:prstGeom prst="rect">
             <a:avLst/>
@@ -3225,14 +3693,14 @@
       </p:sp>
       <p:sp>
         <p:nvSpPr>
-          <p:cNvPr id="68" name="Shape 66"/>
+          <p:cNvPr id="80" name="Shape 78"/>
           <p:cNvSpPr/>
           <p:nvPr/>
         </p:nvSpPr>
         <p:spPr>
           <a:xfrm>
-            <a:off x="8220456" y="1787195"/>
-            <a:ext cx="96145" cy="211226"/>
+            <a:off x="8421624" y="1787195"/>
+            <a:ext cx="70607" cy="211226"/>
           </a:xfrm>
           <a:prstGeom prst="rect">
             <a:avLst/>
@@ -3245,13 +3713,13 @@
       </p:sp>
       <p:sp>
         <p:nvSpPr>
-          <p:cNvPr id="69" name="Text 67"/>
-          <p:cNvSpPr txBox="1"/>
-          <p:nvPr/>
-        </p:nvSpPr>
-        <p:spPr>
-          <a:xfrm>
-            <a:off x="8860536" y="1700784"/>
+          <p:cNvPr id="81" name="Text 79"/>
+          <p:cNvSpPr txBox="1"/>
+          <p:nvPr/>
+        </p:nvSpPr>
+        <p:spPr>
+          <a:xfrm>
+            <a:off x="8906256" y="1700784"/>
             <a:ext cx="1024128" cy="384048"/>
           </a:xfrm>
           <a:prstGeom prst="rect">
@@ -3284,13 +3752,13 @@
       </p:sp>
       <p:sp>
         <p:nvSpPr>
-          <p:cNvPr id="70" name="Text 68"/>
-          <p:cNvSpPr txBox="1"/>
-          <p:nvPr/>
-        </p:nvSpPr>
-        <p:spPr>
-          <a:xfrm>
-            <a:off x="9884664" y="1700784"/>
+          <p:cNvPr id="82" name="Text 80"/>
+          <p:cNvSpPr txBox="1"/>
+          <p:nvPr/>
+        </p:nvSpPr>
+        <p:spPr>
+          <a:xfrm>
+            <a:off x="9930384" y="1700784"/>
             <a:ext cx="768096" cy="384048"/>
           </a:xfrm>
           <a:prstGeom prst="rect">
@@ -3323,13 +3791,13 @@
       </p:sp>
       <p:sp>
         <p:nvSpPr>
-          <p:cNvPr id="71" name="Text 69"/>
-          <p:cNvSpPr txBox="1"/>
-          <p:nvPr/>
-        </p:nvSpPr>
-        <p:spPr>
-          <a:xfrm>
-            <a:off x="10652760" y="1700784"/>
+          <p:cNvPr id="83" name="Text 81"/>
+          <p:cNvSpPr txBox="1"/>
+          <p:nvPr/>
+        </p:nvSpPr>
+        <p:spPr>
+          <a:xfrm>
+            <a:off x="10698480" y="1700784"/>
             <a:ext cx="768096" cy="384048"/>
           </a:xfrm>
           <a:prstGeom prst="rect">
@@ -3362,14 +3830,53 @@
       </p:sp>
       <p:sp>
         <p:nvSpPr>
-          <p:cNvPr id="72" name="Text 70"/>
+          <p:cNvPr id="84" name="Text 82"/>
           <p:cNvSpPr txBox="1"/>
           <p:nvPr/>
         </p:nvSpPr>
         <p:spPr>
           <a:xfrm>
             <a:off x="6208776" y="2084832"/>
-            <a:ext cx="1938528" cy="384048"/>
+            <a:ext cx="310896" cy="384048"/>
+          </a:xfrm>
+          <a:prstGeom prst="rect">
+            <a:avLst/>
+          </a:prstGeom>
+          <a:noFill/>
+          <a:ln/>
+        </p:spPr>
+        <p:txBody>
+          <a:bodyPr wrap="square" lIns="0" tIns="0" rIns="0" bIns="0" rtlCol="0" anchor="ctr"/>
+          <a:lstStyle/>
+          <a:p>
+            <a:pPr algn="r" indent="0" marL="0">
+              <a:buNone/>
+            </a:pPr>
+            <a:r>
+              <a:rPr lang="en-US" sz="1200" dirty="0">
+                <a:solidFill>
+                  <a:srgbClr val="9AA3AD"/>
+                </a:solidFill>
+                <a:latin typeface="Inter" pitchFamily="34" charset="0"/>
+                <a:ea typeface="Inter" pitchFamily="34" charset="-122"/>
+                <a:cs typeface="Inter" pitchFamily="34" charset="-120"/>
+              </a:rPr>
+              <a:t>13</a:t>
+            </a:r>
+            <a:endParaRPr lang="en-US" sz="1200" dirty="0"/>
+          </a:p>
+        </p:txBody>
+      </p:sp>
+      <p:sp>
+        <p:nvSpPr>
+          <p:cNvPr id="85" name="Text 83"/>
+          <p:cNvSpPr txBox="1"/>
+          <p:nvPr/>
+        </p:nvSpPr>
+        <p:spPr>
+          <a:xfrm>
+            <a:off x="6565392" y="2084832"/>
+            <a:ext cx="1783080" cy="384048"/>
           </a:xfrm>
           <a:prstGeom prst="rect">
             <a:avLst/>
@@ -3401,14 +3908,14 @@
       </p:sp>
       <p:sp>
         <p:nvSpPr>
-          <p:cNvPr id="73" name="Shape 71"/>
+          <p:cNvPr id="86" name="Shape 84"/>
           <p:cNvSpPr/>
           <p:nvPr/>
         </p:nvSpPr>
         <p:spPr>
           <a:xfrm>
-            <a:off x="8220456" y="2171243"/>
-            <a:ext cx="89775" cy="211226"/>
+            <a:off x="8421624" y="2171243"/>
+            <a:ext cx="65929" cy="211226"/>
           </a:xfrm>
           <a:prstGeom prst="rect">
             <a:avLst/>
@@ -3421,13 +3928,13 @@
       </p:sp>
       <p:sp>
         <p:nvSpPr>
-          <p:cNvPr id="74" name="Text 72"/>
-          <p:cNvSpPr txBox="1"/>
-          <p:nvPr/>
-        </p:nvSpPr>
-        <p:spPr>
-          <a:xfrm>
-            <a:off x="8860536" y="2084832"/>
+          <p:cNvPr id="87" name="Text 85"/>
+          <p:cNvSpPr txBox="1"/>
+          <p:nvPr/>
+        </p:nvSpPr>
+        <p:spPr>
+          <a:xfrm>
+            <a:off x="8906256" y="2084832"/>
             <a:ext cx="1024128" cy="384048"/>
           </a:xfrm>
           <a:prstGeom prst="rect">
@@ -3460,13 +3967,13 @@
       </p:sp>
       <p:sp>
         <p:nvSpPr>
-          <p:cNvPr id="75" name="Text 73"/>
-          <p:cNvSpPr txBox="1"/>
-          <p:nvPr/>
-        </p:nvSpPr>
-        <p:spPr>
-          <a:xfrm>
-            <a:off x="9884664" y="2084832"/>
+          <p:cNvPr id="88" name="Text 86"/>
+          <p:cNvSpPr txBox="1"/>
+          <p:nvPr/>
+        </p:nvSpPr>
+        <p:spPr>
+          <a:xfrm>
+            <a:off x="9930384" y="2084832"/>
             <a:ext cx="768096" cy="384048"/>
           </a:xfrm>
           <a:prstGeom prst="rect">
@@ -3499,13 +4006,13 @@
       </p:sp>
       <p:sp>
         <p:nvSpPr>
-          <p:cNvPr id="76" name="Text 74"/>
-          <p:cNvSpPr txBox="1"/>
-          <p:nvPr/>
-        </p:nvSpPr>
-        <p:spPr>
-          <a:xfrm>
-            <a:off x="10652760" y="2084832"/>
+          <p:cNvPr id="89" name="Text 87"/>
+          <p:cNvSpPr txBox="1"/>
+          <p:nvPr/>
+        </p:nvSpPr>
+        <p:spPr>
+          <a:xfrm>
+            <a:off x="10698480" y="2084832"/>
             <a:ext cx="768096" cy="384048"/>
           </a:xfrm>
           <a:prstGeom prst="rect">
@@ -3538,14 +4045,53 @@
       </p:sp>
       <p:sp>
         <p:nvSpPr>
-          <p:cNvPr id="77" name="Text 75"/>
+          <p:cNvPr id="90" name="Text 88"/>
           <p:cNvSpPr txBox="1"/>
           <p:nvPr/>
         </p:nvSpPr>
         <p:spPr>
           <a:xfrm>
             <a:off x="6208776" y="2468880"/>
-            <a:ext cx="1938528" cy="384048"/>
+            <a:ext cx="310896" cy="384048"/>
+          </a:xfrm>
+          <a:prstGeom prst="rect">
+            <a:avLst/>
+          </a:prstGeom>
+          <a:noFill/>
+          <a:ln/>
+        </p:spPr>
+        <p:txBody>
+          <a:bodyPr wrap="square" lIns="0" tIns="0" rIns="0" bIns="0" rtlCol="0" anchor="ctr"/>
+          <a:lstStyle/>
+          <a:p>
+            <a:pPr algn="r" indent="0" marL="0">
+              <a:buNone/>
+            </a:pPr>
+            <a:r>
+              <a:rPr lang="en-US" sz="1200" dirty="0">
+                <a:solidFill>
+                  <a:srgbClr val="9AA3AD"/>
+                </a:solidFill>
+                <a:latin typeface="Inter" pitchFamily="34" charset="0"/>
+                <a:ea typeface="Inter" pitchFamily="34" charset="-122"/>
+                <a:cs typeface="Inter" pitchFamily="34" charset="-120"/>
+              </a:rPr>
+              <a:t>14</a:t>
+            </a:r>
+            <a:endParaRPr lang="en-US" sz="1200" dirty="0"/>
+          </a:p>
+        </p:txBody>
+      </p:sp>
+      <p:sp>
+        <p:nvSpPr>
+          <p:cNvPr id="91" name="Text 89"/>
+          <p:cNvSpPr txBox="1"/>
+          <p:nvPr/>
+        </p:nvSpPr>
+        <p:spPr>
+          <a:xfrm>
+            <a:off x="6565392" y="2468880"/>
+            <a:ext cx="1783080" cy="384048"/>
           </a:xfrm>
           <a:prstGeom prst="rect">
             <a:avLst/>
@@ -3577,14 +4123,14 @@
       </p:sp>
       <p:sp>
         <p:nvSpPr>
-          <p:cNvPr id="78" name="Shape 76"/>
+          <p:cNvPr id="92" name="Shape 90"/>
           <p:cNvSpPr/>
           <p:nvPr/>
         </p:nvSpPr>
         <p:spPr>
           <a:xfrm>
-            <a:off x="8220456" y="2555291"/>
-            <a:ext cx="88284" cy="211226"/>
+            <a:off x="8421624" y="2555291"/>
+            <a:ext cx="64833" cy="211226"/>
           </a:xfrm>
           <a:prstGeom prst="rect">
             <a:avLst/>
@@ -3597,13 +4143,13 @@
       </p:sp>
       <p:sp>
         <p:nvSpPr>
-          <p:cNvPr id="79" name="Text 77"/>
-          <p:cNvSpPr txBox="1"/>
-          <p:nvPr/>
-        </p:nvSpPr>
-        <p:spPr>
-          <a:xfrm>
-            <a:off x="8860536" y="2468880"/>
+          <p:cNvPr id="93" name="Text 91"/>
+          <p:cNvSpPr txBox="1"/>
+          <p:nvPr/>
+        </p:nvSpPr>
+        <p:spPr>
+          <a:xfrm>
+            <a:off x="8906256" y="2468880"/>
             <a:ext cx="1024128" cy="384048"/>
           </a:xfrm>
           <a:prstGeom prst="rect">
@@ -3636,13 +4182,13 @@
       </p:sp>
       <p:sp>
         <p:nvSpPr>
-          <p:cNvPr id="80" name="Text 78"/>
-          <p:cNvSpPr txBox="1"/>
-          <p:nvPr/>
-        </p:nvSpPr>
-        <p:spPr>
-          <a:xfrm>
-            <a:off x="9884664" y="2468880"/>
+          <p:cNvPr id="94" name="Text 92"/>
+          <p:cNvSpPr txBox="1"/>
+          <p:nvPr/>
+        </p:nvSpPr>
+        <p:spPr>
+          <a:xfrm>
+            <a:off x="9930384" y="2468880"/>
             <a:ext cx="768096" cy="384048"/>
           </a:xfrm>
           <a:prstGeom prst="rect">
@@ -3675,13 +4221,13 @@
       </p:sp>
       <p:sp>
         <p:nvSpPr>
-          <p:cNvPr id="81" name="Text 79"/>
-          <p:cNvSpPr txBox="1"/>
-          <p:nvPr/>
-        </p:nvSpPr>
-        <p:spPr>
-          <a:xfrm>
-            <a:off x="10652760" y="2468880"/>
+          <p:cNvPr id="95" name="Text 93"/>
+          <p:cNvSpPr txBox="1"/>
+          <p:nvPr/>
+        </p:nvSpPr>
+        <p:spPr>
+          <a:xfrm>
+            <a:off x="10698480" y="2468880"/>
             <a:ext cx="768096" cy="384048"/>
           </a:xfrm>
           <a:prstGeom prst="rect">
@@ -3714,14 +4260,53 @@
       </p:sp>
       <p:sp>
         <p:nvSpPr>
-          <p:cNvPr id="82" name="Text 80"/>
+          <p:cNvPr id="96" name="Text 94"/>
           <p:cNvSpPr txBox="1"/>
           <p:nvPr/>
         </p:nvSpPr>
         <p:spPr>
           <a:xfrm>
             <a:off x="6208776" y="2852928"/>
-            <a:ext cx="1938528" cy="384048"/>
+            <a:ext cx="310896" cy="384048"/>
+          </a:xfrm>
+          <a:prstGeom prst="rect">
+            <a:avLst/>
+          </a:prstGeom>
+          <a:noFill/>
+          <a:ln/>
+        </p:spPr>
+        <p:txBody>
+          <a:bodyPr wrap="square" lIns="0" tIns="0" rIns="0" bIns="0" rtlCol="0" anchor="ctr"/>
+          <a:lstStyle/>
+          <a:p>
+            <a:pPr algn="r" indent="0" marL="0">
+              <a:buNone/>
+            </a:pPr>
+            <a:r>
+              <a:rPr lang="en-US" sz="1200" dirty="0">
+                <a:solidFill>
+                  <a:srgbClr val="9AA3AD"/>
+                </a:solidFill>
+                <a:latin typeface="Inter" pitchFamily="34" charset="0"/>
+                <a:ea typeface="Inter" pitchFamily="34" charset="-122"/>
+                <a:cs typeface="Inter" pitchFamily="34" charset="-120"/>
+              </a:rPr>
+              <a:t>15</a:t>
+            </a:r>
+            <a:endParaRPr lang="en-US" sz="1200" dirty="0"/>
+          </a:p>
+        </p:txBody>
+      </p:sp>
+      <p:sp>
+        <p:nvSpPr>
+          <p:cNvPr id="97" name="Text 95"/>
+          <p:cNvSpPr txBox="1"/>
+          <p:nvPr/>
+        </p:nvSpPr>
+        <p:spPr>
+          <a:xfrm>
+            <a:off x="6565392" y="2852928"/>
+            <a:ext cx="1783080" cy="384048"/>
           </a:xfrm>
           <a:prstGeom prst="rect">
             <a:avLst/>
@@ -3753,14 +4338,14 @@
       </p:sp>
       <p:sp>
         <p:nvSpPr>
-          <p:cNvPr id="83" name="Shape 81"/>
+          <p:cNvPr id="98" name="Shape 96"/>
           <p:cNvSpPr/>
           <p:nvPr/>
         </p:nvSpPr>
         <p:spPr>
           <a:xfrm>
-            <a:off x="8220456" y="2939339"/>
-            <a:ext cx="81589" cy="211226"/>
+            <a:off x="8421624" y="2939339"/>
+            <a:ext cx="59917" cy="211226"/>
           </a:xfrm>
           <a:prstGeom prst="rect">
             <a:avLst/>
@@ -3773,13 +4358,13 @@
       </p:sp>
       <p:sp>
         <p:nvSpPr>
-          <p:cNvPr id="84" name="Text 82"/>
-          <p:cNvSpPr txBox="1"/>
-          <p:nvPr/>
-        </p:nvSpPr>
-        <p:spPr>
-          <a:xfrm>
-            <a:off x="8860536" y="2852928"/>
+          <p:cNvPr id="99" name="Text 97"/>
+          <p:cNvSpPr txBox="1"/>
+          <p:nvPr/>
+        </p:nvSpPr>
+        <p:spPr>
+          <a:xfrm>
+            <a:off x="8906256" y="2852928"/>
             <a:ext cx="1024128" cy="384048"/>
           </a:xfrm>
           <a:prstGeom prst="rect">
@@ -3812,13 +4397,13 @@
       </p:sp>
       <p:sp>
         <p:nvSpPr>
-          <p:cNvPr id="85" name="Text 83"/>
-          <p:cNvSpPr txBox="1"/>
-          <p:nvPr/>
-        </p:nvSpPr>
-        <p:spPr>
-          <a:xfrm>
-            <a:off x="9884664" y="2852928"/>
+          <p:cNvPr id="100" name="Text 98"/>
+          <p:cNvSpPr txBox="1"/>
+          <p:nvPr/>
+        </p:nvSpPr>
+        <p:spPr>
+          <a:xfrm>
+            <a:off x="9930384" y="2852928"/>
             <a:ext cx="768096" cy="384048"/>
           </a:xfrm>
           <a:prstGeom prst="rect">
@@ -3851,13 +4436,13 @@
       </p:sp>
       <p:sp>
         <p:nvSpPr>
-          <p:cNvPr id="86" name="Text 84"/>
-          <p:cNvSpPr txBox="1"/>
-          <p:nvPr/>
-        </p:nvSpPr>
-        <p:spPr>
-          <a:xfrm>
-            <a:off x="10652760" y="2852928"/>
+          <p:cNvPr id="101" name="Text 99"/>
+          <p:cNvSpPr txBox="1"/>
+          <p:nvPr/>
+        </p:nvSpPr>
+        <p:spPr>
+          <a:xfrm>
+            <a:off x="10698480" y="2852928"/>
             <a:ext cx="768096" cy="384048"/>
           </a:xfrm>
           <a:prstGeom prst="rect">
@@ -3890,14 +4475,53 @@
       </p:sp>
       <p:sp>
         <p:nvSpPr>
-          <p:cNvPr id="87" name="Text 85"/>
+          <p:cNvPr id="102" name="Text 100"/>
           <p:cNvSpPr txBox="1"/>
           <p:nvPr/>
         </p:nvSpPr>
         <p:spPr>
           <a:xfrm>
             <a:off x="6208776" y="3236976"/>
-            <a:ext cx="1938528" cy="384048"/>
+            <a:ext cx="310896" cy="384048"/>
+          </a:xfrm>
+          <a:prstGeom prst="rect">
+            <a:avLst/>
+          </a:prstGeom>
+          <a:noFill/>
+          <a:ln/>
+        </p:spPr>
+        <p:txBody>
+          <a:bodyPr wrap="square" lIns="0" tIns="0" rIns="0" bIns="0" rtlCol="0" anchor="ctr"/>
+          <a:lstStyle/>
+          <a:p>
+            <a:pPr algn="r" indent="0" marL="0">
+              <a:buNone/>
+            </a:pPr>
+            <a:r>
+              <a:rPr lang="en-US" sz="1200" dirty="0">
+                <a:solidFill>
+                  <a:srgbClr val="9AA3AD"/>
+                </a:solidFill>
+                <a:latin typeface="Inter" pitchFamily="34" charset="0"/>
+                <a:ea typeface="Inter" pitchFamily="34" charset="-122"/>
+                <a:cs typeface="Inter" pitchFamily="34" charset="-120"/>
+              </a:rPr>
+              <a:t>16</a:t>
+            </a:r>
+            <a:endParaRPr lang="en-US" sz="1200" dirty="0"/>
+          </a:p>
+        </p:txBody>
+      </p:sp>
+      <p:sp>
+        <p:nvSpPr>
+          <p:cNvPr id="103" name="Text 101"/>
+          <p:cNvSpPr txBox="1"/>
+          <p:nvPr/>
+        </p:nvSpPr>
+        <p:spPr>
+          <a:xfrm>
+            <a:off x="6565392" y="3236976"/>
+            <a:ext cx="1783080" cy="384048"/>
           </a:xfrm>
           <a:prstGeom prst="rect">
             <a:avLst/>
@@ -3929,14 +4553,14 @@
       </p:sp>
       <p:sp>
         <p:nvSpPr>
-          <p:cNvPr id="88" name="Shape 86"/>
+          <p:cNvPr id="104" name="Shape 102"/>
           <p:cNvSpPr/>
           <p:nvPr/>
         </p:nvSpPr>
         <p:spPr>
           <a:xfrm>
-            <a:off x="8220456" y="3323387"/>
-            <a:ext cx="73764" cy="211226"/>
+            <a:off x="8421624" y="3323387"/>
+            <a:ext cx="54171" cy="211226"/>
           </a:xfrm>
           <a:prstGeom prst="rect">
             <a:avLst/>
@@ -3949,13 +4573,13 @@
       </p:sp>
       <p:sp>
         <p:nvSpPr>
-          <p:cNvPr id="89" name="Text 87"/>
-          <p:cNvSpPr txBox="1"/>
-          <p:nvPr/>
-        </p:nvSpPr>
-        <p:spPr>
-          <a:xfrm>
-            <a:off x="8860536" y="3236976"/>
+          <p:cNvPr id="105" name="Text 103"/>
+          <p:cNvSpPr txBox="1"/>
+          <p:nvPr/>
+        </p:nvSpPr>
+        <p:spPr>
+          <a:xfrm>
+            <a:off x="8906256" y="3236976"/>
             <a:ext cx="1024128" cy="384048"/>
           </a:xfrm>
           <a:prstGeom prst="rect">
@@ -3988,13 +4612,13 @@
       </p:sp>
       <p:sp>
         <p:nvSpPr>
-          <p:cNvPr id="90" name="Text 88"/>
-          <p:cNvSpPr txBox="1"/>
-          <p:nvPr/>
-        </p:nvSpPr>
-        <p:spPr>
-          <a:xfrm>
-            <a:off x="9884664" y="3236976"/>
+          <p:cNvPr id="106" name="Text 104"/>
+          <p:cNvSpPr txBox="1"/>
+          <p:nvPr/>
+        </p:nvSpPr>
+        <p:spPr>
+          <a:xfrm>
+            <a:off x="9930384" y="3236976"/>
             <a:ext cx="768096" cy="384048"/>
           </a:xfrm>
           <a:prstGeom prst="rect">
@@ -4027,13 +4651,13 @@
       </p:sp>
       <p:sp>
         <p:nvSpPr>
-          <p:cNvPr id="91" name="Text 89"/>
-          <p:cNvSpPr txBox="1"/>
-          <p:nvPr/>
-        </p:nvSpPr>
-        <p:spPr>
-          <a:xfrm>
-            <a:off x="10652760" y="3236976"/>
+          <p:cNvPr id="107" name="Text 105"/>
+          <p:cNvSpPr txBox="1"/>
+          <p:nvPr/>
+        </p:nvSpPr>
+        <p:spPr>
+          <a:xfrm>
+            <a:off x="10698480" y="3236976"/>
             <a:ext cx="768096" cy="384048"/>
           </a:xfrm>
           <a:prstGeom prst="rect">
@@ -4066,14 +4690,53 @@
       </p:sp>
       <p:sp>
         <p:nvSpPr>
-          <p:cNvPr id="92" name="Text 90"/>
+          <p:cNvPr id="108" name="Text 106"/>
           <p:cNvSpPr txBox="1"/>
           <p:nvPr/>
         </p:nvSpPr>
         <p:spPr>
           <a:xfrm>
             <a:off x="6208776" y="3621024"/>
-            <a:ext cx="1938528" cy="384048"/>
+            <a:ext cx="310896" cy="384048"/>
+          </a:xfrm>
+          <a:prstGeom prst="rect">
+            <a:avLst/>
+          </a:prstGeom>
+          <a:noFill/>
+          <a:ln/>
+        </p:spPr>
+        <p:txBody>
+          <a:bodyPr wrap="square" lIns="0" tIns="0" rIns="0" bIns="0" rtlCol="0" anchor="ctr"/>
+          <a:lstStyle/>
+          <a:p>
+            <a:pPr algn="r" indent="0" marL="0">
+              <a:buNone/>
+            </a:pPr>
+            <a:r>
+              <a:rPr lang="en-US" sz="1200" dirty="0">
+                <a:solidFill>
+                  <a:srgbClr val="9AA3AD"/>
+                </a:solidFill>
+                <a:latin typeface="Inter" pitchFamily="34" charset="0"/>
+                <a:ea typeface="Inter" pitchFamily="34" charset="-122"/>
+                <a:cs typeface="Inter" pitchFamily="34" charset="-120"/>
+              </a:rPr>
+              <a:t>17</a:t>
+            </a:r>
+            <a:endParaRPr lang="en-US" sz="1200" dirty="0"/>
+          </a:p>
+        </p:txBody>
+      </p:sp>
+      <p:sp>
+        <p:nvSpPr>
+          <p:cNvPr id="109" name="Text 107"/>
+          <p:cNvSpPr txBox="1"/>
+          <p:nvPr/>
+        </p:nvSpPr>
+        <p:spPr>
+          <a:xfrm>
+            <a:off x="6565392" y="3621024"/>
+            <a:ext cx="1783080" cy="384048"/>
           </a:xfrm>
           <a:prstGeom prst="rect">
             <a:avLst/>
@@ -4105,14 +4768,14 @@
       </p:sp>
       <p:sp>
         <p:nvSpPr>
-          <p:cNvPr id="93" name="Shape 91"/>
+          <p:cNvPr id="110" name="Shape 108"/>
           <p:cNvSpPr/>
           <p:nvPr/>
         </p:nvSpPr>
         <p:spPr>
           <a:xfrm>
-            <a:off x="8220456" y="3707435"/>
-            <a:ext cx="45418" cy="211226"/>
+            <a:off x="8421624" y="3707435"/>
+            <a:ext cx="33354" cy="211226"/>
           </a:xfrm>
           <a:prstGeom prst="rect">
             <a:avLst/>
@@ -4125,13 +4788,13 @@
       </p:sp>
       <p:sp>
         <p:nvSpPr>
-          <p:cNvPr id="94" name="Text 92"/>
-          <p:cNvSpPr txBox="1"/>
-          <p:nvPr/>
-        </p:nvSpPr>
-        <p:spPr>
-          <a:xfrm>
-            <a:off x="8860536" y="3621024"/>
+          <p:cNvPr id="111" name="Text 109"/>
+          <p:cNvSpPr txBox="1"/>
+          <p:nvPr/>
+        </p:nvSpPr>
+        <p:spPr>
+          <a:xfrm>
+            <a:off x="8906256" y="3621024"/>
             <a:ext cx="1024128" cy="384048"/>
           </a:xfrm>
           <a:prstGeom prst="rect">
@@ -4164,13 +4827,13 @@
       </p:sp>
       <p:sp>
         <p:nvSpPr>
-          <p:cNvPr id="95" name="Text 93"/>
-          <p:cNvSpPr txBox="1"/>
-          <p:nvPr/>
-        </p:nvSpPr>
-        <p:spPr>
-          <a:xfrm>
-            <a:off x="9884664" y="3621024"/>
+          <p:cNvPr id="112" name="Text 110"/>
+          <p:cNvSpPr txBox="1"/>
+          <p:nvPr/>
+        </p:nvSpPr>
+        <p:spPr>
+          <a:xfrm>
+            <a:off x="9930384" y="3621024"/>
             <a:ext cx="768096" cy="384048"/>
           </a:xfrm>
           <a:prstGeom prst="rect">
@@ -4203,13 +4866,13 @@
       </p:sp>
       <p:sp>
         <p:nvSpPr>
-          <p:cNvPr id="96" name="Text 94"/>
-          <p:cNvSpPr txBox="1"/>
-          <p:nvPr/>
-        </p:nvSpPr>
-        <p:spPr>
-          <a:xfrm>
-            <a:off x="10652760" y="3621024"/>
+          <p:cNvPr id="113" name="Text 111"/>
+          <p:cNvSpPr txBox="1"/>
+          <p:nvPr/>
+        </p:nvSpPr>
+        <p:spPr>
+          <a:xfrm>
+            <a:off x="10698480" y="3621024"/>
             <a:ext cx="768096" cy="384048"/>
           </a:xfrm>
           <a:prstGeom prst="rect">
@@ -4242,14 +4905,53 @@
       </p:sp>
       <p:sp>
         <p:nvSpPr>
-          <p:cNvPr id="97" name="Text 95"/>
+          <p:cNvPr id="114" name="Text 112"/>
           <p:cNvSpPr txBox="1"/>
           <p:nvPr/>
         </p:nvSpPr>
         <p:spPr>
           <a:xfrm>
             <a:off x="6208776" y="4005072"/>
-            <a:ext cx="1938528" cy="384048"/>
+            <a:ext cx="310896" cy="384048"/>
+          </a:xfrm>
+          <a:prstGeom prst="rect">
+            <a:avLst/>
+          </a:prstGeom>
+          <a:noFill/>
+          <a:ln/>
+        </p:spPr>
+        <p:txBody>
+          <a:bodyPr wrap="square" lIns="0" tIns="0" rIns="0" bIns="0" rtlCol="0" anchor="ctr"/>
+          <a:lstStyle/>
+          <a:p>
+            <a:pPr algn="r" indent="0" marL="0">
+              <a:buNone/>
+            </a:pPr>
+            <a:r>
+              <a:rPr lang="en-US" sz="1200" dirty="0">
+                <a:solidFill>
+                  <a:srgbClr val="9AA3AD"/>
+                </a:solidFill>
+                <a:latin typeface="Inter" pitchFamily="34" charset="0"/>
+                <a:ea typeface="Inter" pitchFamily="34" charset="-122"/>
+                <a:cs typeface="Inter" pitchFamily="34" charset="-120"/>
+              </a:rPr>
+              <a:t>18</a:t>
+            </a:r>
+            <a:endParaRPr lang="en-US" sz="1200" dirty="0"/>
+          </a:p>
+        </p:txBody>
+      </p:sp>
+      <p:sp>
+        <p:nvSpPr>
+          <p:cNvPr id="115" name="Text 113"/>
+          <p:cNvSpPr txBox="1"/>
+          <p:nvPr/>
+        </p:nvSpPr>
+        <p:spPr>
+          <a:xfrm>
+            <a:off x="6565392" y="4005072"/>
+            <a:ext cx="1783080" cy="384048"/>
           </a:xfrm>
           <a:prstGeom prst="rect">
             <a:avLst/>
@@ -4281,14 +4983,14 @@
       </p:sp>
       <p:sp>
         <p:nvSpPr>
-          <p:cNvPr id="98" name="Shape 96"/>
+          <p:cNvPr id="116" name="Shape 114"/>
           <p:cNvSpPr/>
           <p:nvPr/>
         </p:nvSpPr>
         <p:spPr>
           <a:xfrm>
-            <a:off x="8220456" y="4091483"/>
-            <a:ext cx="37443" cy="211226"/>
+            <a:off x="8421624" y="4091483"/>
+            <a:ext cx="27497" cy="211226"/>
           </a:xfrm>
           <a:prstGeom prst="rect">
             <a:avLst/>
@@ -4301,13 +5003,13 @@
       </p:sp>
       <p:sp>
         <p:nvSpPr>
-          <p:cNvPr id="99" name="Text 97"/>
-          <p:cNvSpPr txBox="1"/>
-          <p:nvPr/>
-        </p:nvSpPr>
-        <p:spPr>
-          <a:xfrm>
-            <a:off x="8860536" y="4005072"/>
+          <p:cNvPr id="117" name="Text 115"/>
+          <p:cNvSpPr txBox="1"/>
+          <p:nvPr/>
+        </p:nvSpPr>
+        <p:spPr>
+          <a:xfrm>
+            <a:off x="8906256" y="4005072"/>
             <a:ext cx="1024128" cy="384048"/>
           </a:xfrm>
           <a:prstGeom prst="rect">
@@ -4340,13 +5042,13 @@
       </p:sp>
       <p:sp>
         <p:nvSpPr>
-          <p:cNvPr id="100" name="Text 98"/>
-          <p:cNvSpPr txBox="1"/>
-          <p:nvPr/>
-        </p:nvSpPr>
-        <p:spPr>
-          <a:xfrm>
-            <a:off x="9884664" y="4005072"/>
+          <p:cNvPr id="118" name="Text 116"/>
+          <p:cNvSpPr txBox="1"/>
+          <p:nvPr/>
+        </p:nvSpPr>
+        <p:spPr>
+          <a:xfrm>
+            <a:off x="9930384" y="4005072"/>
             <a:ext cx="768096" cy="384048"/>
           </a:xfrm>
           <a:prstGeom prst="rect">
@@ -4379,13 +5081,13 @@
       </p:sp>
       <p:sp>
         <p:nvSpPr>
-          <p:cNvPr id="101" name="Text 99"/>
-          <p:cNvSpPr txBox="1"/>
-          <p:nvPr/>
-        </p:nvSpPr>
-        <p:spPr>
-          <a:xfrm>
-            <a:off x="10652760" y="4005072"/>
+          <p:cNvPr id="119" name="Text 117"/>
+          <p:cNvSpPr txBox="1"/>
+          <p:nvPr/>
+        </p:nvSpPr>
+        <p:spPr>
+          <a:xfrm>
+            <a:off x="10698480" y="4005072"/>
             <a:ext cx="768096" cy="384048"/>
           </a:xfrm>
           <a:prstGeom prst="rect">
@@ -4418,14 +5120,53 @@
       </p:sp>
       <p:sp>
         <p:nvSpPr>
-          <p:cNvPr id="102" name="Text 100"/>
+          <p:cNvPr id="120" name="Text 118"/>
           <p:cNvSpPr txBox="1"/>
           <p:nvPr/>
         </p:nvSpPr>
         <p:spPr>
           <a:xfrm>
             <a:off x="6208776" y="4389120"/>
-            <a:ext cx="1938528" cy="384048"/>
+            <a:ext cx="310896" cy="384048"/>
+          </a:xfrm>
+          <a:prstGeom prst="rect">
+            <a:avLst/>
+          </a:prstGeom>
+          <a:noFill/>
+          <a:ln/>
+        </p:spPr>
+        <p:txBody>
+          <a:bodyPr wrap="square" lIns="0" tIns="0" rIns="0" bIns="0" rtlCol="0" anchor="ctr"/>
+          <a:lstStyle/>
+          <a:p>
+            <a:pPr algn="r" indent="0" marL="0">
+              <a:buNone/>
+            </a:pPr>
+            <a:r>
+              <a:rPr lang="en-US" sz="1200" dirty="0">
+                <a:solidFill>
+                  <a:srgbClr val="9AA3AD"/>
+                </a:solidFill>
+                <a:latin typeface="Inter" pitchFamily="34" charset="0"/>
+                <a:ea typeface="Inter" pitchFamily="34" charset="-122"/>
+                <a:cs typeface="Inter" pitchFamily="34" charset="-120"/>
+              </a:rPr>
+              <a:t>19</a:t>
+            </a:r>
+            <a:endParaRPr lang="en-US" sz="1200" dirty="0"/>
+          </a:p>
+        </p:txBody>
+      </p:sp>
+      <p:sp>
+        <p:nvSpPr>
+          <p:cNvPr id="121" name="Text 119"/>
+          <p:cNvSpPr txBox="1"/>
+          <p:nvPr/>
+        </p:nvSpPr>
+        <p:spPr>
+          <a:xfrm>
+            <a:off x="6565392" y="4389120"/>
+            <a:ext cx="1783080" cy="384048"/>
           </a:xfrm>
           <a:prstGeom prst="rect">
             <a:avLst/>
@@ -4457,14 +5198,14 @@
       </p:sp>
       <p:sp>
         <p:nvSpPr>
-          <p:cNvPr id="103" name="Shape 101"/>
+          <p:cNvPr id="122" name="Shape 120"/>
           <p:cNvSpPr/>
           <p:nvPr/>
         </p:nvSpPr>
         <p:spPr>
           <a:xfrm>
-            <a:off x="8220456" y="4475531"/>
-            <a:ext cx="26036" cy="211226"/>
+            <a:off x="8421624" y="4475531"/>
+            <a:ext cx="19120" cy="211226"/>
           </a:xfrm>
           <a:prstGeom prst="rect">
             <a:avLst/>
@@ -4477,13 +5218,13 @@
       </p:sp>
       <p:sp>
         <p:nvSpPr>
-          <p:cNvPr id="104" name="Text 102"/>
-          <p:cNvSpPr txBox="1"/>
-          <p:nvPr/>
-        </p:nvSpPr>
-        <p:spPr>
-          <a:xfrm>
-            <a:off x="8860536" y="4389120"/>
+          <p:cNvPr id="123" name="Text 121"/>
+          <p:cNvSpPr txBox="1"/>
+          <p:nvPr/>
+        </p:nvSpPr>
+        <p:spPr>
+          <a:xfrm>
+            <a:off x="8906256" y="4389120"/>
             <a:ext cx="1024128" cy="384048"/>
           </a:xfrm>
           <a:prstGeom prst="rect">
@@ -4516,13 +5257,13 @@
       </p:sp>
       <p:sp>
         <p:nvSpPr>
-          <p:cNvPr id="105" name="Text 103"/>
-          <p:cNvSpPr txBox="1"/>
-          <p:nvPr/>
-        </p:nvSpPr>
-        <p:spPr>
-          <a:xfrm>
-            <a:off x="9884664" y="4389120"/>
+          <p:cNvPr id="124" name="Text 122"/>
+          <p:cNvSpPr txBox="1"/>
+          <p:nvPr/>
+        </p:nvSpPr>
+        <p:spPr>
+          <a:xfrm>
+            <a:off x="9930384" y="4389120"/>
             <a:ext cx="768096" cy="384048"/>
           </a:xfrm>
           <a:prstGeom prst="rect">
@@ -4555,13 +5296,13 @@
       </p:sp>
       <p:sp>
         <p:nvSpPr>
-          <p:cNvPr id="106" name="Text 104"/>
-          <p:cNvSpPr txBox="1"/>
-          <p:nvPr/>
-        </p:nvSpPr>
-        <p:spPr>
-          <a:xfrm>
-            <a:off x="10652760" y="4389120"/>
+          <p:cNvPr id="125" name="Text 123"/>
+          <p:cNvSpPr txBox="1"/>
+          <p:nvPr/>
+        </p:nvSpPr>
+        <p:spPr>
+          <a:xfrm>
+            <a:off x="10698480" y="4389120"/>
             <a:ext cx="768096" cy="384048"/>
           </a:xfrm>
           <a:prstGeom prst="rect">
@@ -4594,14 +5335,53 @@
       </p:sp>
       <p:sp>
         <p:nvSpPr>
-          <p:cNvPr id="107" name="Text 105"/>
+          <p:cNvPr id="126" name="Text 124"/>
           <p:cNvSpPr txBox="1"/>
           <p:nvPr/>
         </p:nvSpPr>
         <p:spPr>
           <a:xfrm>
             <a:off x="6208776" y="4773168"/>
-            <a:ext cx="1938528" cy="384048"/>
+            <a:ext cx="310896" cy="384048"/>
+          </a:xfrm>
+          <a:prstGeom prst="rect">
+            <a:avLst/>
+          </a:prstGeom>
+          <a:noFill/>
+          <a:ln/>
+        </p:spPr>
+        <p:txBody>
+          <a:bodyPr wrap="square" lIns="0" tIns="0" rIns="0" bIns="0" rtlCol="0" anchor="ctr"/>
+          <a:lstStyle/>
+          <a:p>
+            <a:pPr algn="r" indent="0" marL="0">
+              <a:buNone/>
+            </a:pPr>
+            <a:r>
+              <a:rPr lang="en-US" sz="1200" dirty="0">
+                <a:solidFill>
+                  <a:srgbClr val="9AA3AD"/>
+                </a:solidFill>
+                <a:latin typeface="Inter" pitchFamily="34" charset="0"/>
+                <a:ea typeface="Inter" pitchFamily="34" charset="-122"/>
+                <a:cs typeface="Inter" pitchFamily="34" charset="-120"/>
+              </a:rPr>
+              <a:t>20</a:t>
+            </a:r>
+            <a:endParaRPr lang="en-US" sz="1200" dirty="0"/>
+          </a:p>
+        </p:txBody>
+      </p:sp>
+      <p:sp>
+        <p:nvSpPr>
+          <p:cNvPr id="127" name="Text 125"/>
+          <p:cNvSpPr txBox="1"/>
+          <p:nvPr/>
+        </p:nvSpPr>
+        <p:spPr>
+          <a:xfrm>
+            <a:off x="6565392" y="4773168"/>
+            <a:ext cx="1783080" cy="384048"/>
           </a:xfrm>
           <a:prstGeom prst="rect">
             <a:avLst/>
@@ -4633,13 +5413,13 @@
       </p:sp>
       <p:sp>
         <p:nvSpPr>
-          <p:cNvPr id="108" name="Shape 106"/>
+          <p:cNvPr id="128" name="Shape 126"/>
           <p:cNvSpPr/>
           <p:nvPr/>
         </p:nvSpPr>
         <p:spPr>
           <a:xfrm>
-            <a:off x="8220456" y="4859579"/>
+            <a:off x="8421624" y="4859579"/>
             <a:ext cx="18288" cy="211226"/>
           </a:xfrm>
           <a:prstGeom prst="rect">
@@ -4653,13 +5433,13 @@
       </p:sp>
       <p:sp>
         <p:nvSpPr>
-          <p:cNvPr id="109" name="Text 107"/>
-          <p:cNvSpPr txBox="1"/>
-          <p:nvPr/>
-        </p:nvSpPr>
-        <p:spPr>
-          <a:xfrm>
-            <a:off x="8860536" y="4773168"/>
+          <p:cNvPr id="129" name="Text 127"/>
+          <p:cNvSpPr txBox="1"/>
+          <p:nvPr/>
+        </p:nvSpPr>
+        <p:spPr>
+          <a:xfrm>
+            <a:off x="8906256" y="4773168"/>
             <a:ext cx="1024128" cy="384048"/>
           </a:xfrm>
           <a:prstGeom prst="rect">
@@ -4692,13 +5472,13 @@
       </p:sp>
       <p:sp>
         <p:nvSpPr>
-          <p:cNvPr id="110" name="Text 108"/>
-          <p:cNvSpPr txBox="1"/>
-          <p:nvPr/>
-        </p:nvSpPr>
-        <p:spPr>
-          <a:xfrm>
-            <a:off x="9884664" y="4773168"/>
+          <p:cNvPr id="130" name="Text 128"/>
+          <p:cNvSpPr txBox="1"/>
+          <p:nvPr/>
+        </p:nvSpPr>
+        <p:spPr>
+          <a:xfrm>
+            <a:off x="9930384" y="4773168"/>
             <a:ext cx="768096" cy="384048"/>
           </a:xfrm>
           <a:prstGeom prst="rect">
@@ -4731,13 +5511,13 @@
       </p:sp>
       <p:sp>
         <p:nvSpPr>
-          <p:cNvPr id="111" name="Text 109"/>
-          <p:cNvSpPr txBox="1"/>
-          <p:nvPr/>
-        </p:nvSpPr>
-        <p:spPr>
-          <a:xfrm>
-            <a:off x="10652760" y="4773168"/>
+          <p:cNvPr id="131" name="Text 129"/>
+          <p:cNvSpPr txBox="1"/>
+          <p:nvPr/>
+        </p:nvSpPr>
+        <p:spPr>
+          <a:xfrm>
+            <a:off x="10698480" y="4773168"/>
             <a:ext cx="768096" cy="384048"/>
           </a:xfrm>
           <a:prstGeom prst="rect">
@@ -4770,14 +5550,53 @@
       </p:sp>
       <p:sp>
         <p:nvSpPr>
-          <p:cNvPr id="112" name="Text 110"/>
+          <p:cNvPr id="132" name="Text 130"/>
           <p:cNvSpPr txBox="1"/>
           <p:nvPr/>
         </p:nvSpPr>
         <p:spPr>
           <a:xfrm>
             <a:off x="6208776" y="5157216"/>
-            <a:ext cx="1938528" cy="384048"/>
+            <a:ext cx="310896" cy="384048"/>
+          </a:xfrm>
+          <a:prstGeom prst="rect">
+            <a:avLst/>
+          </a:prstGeom>
+          <a:noFill/>
+          <a:ln/>
+        </p:spPr>
+        <p:txBody>
+          <a:bodyPr wrap="square" lIns="0" tIns="0" rIns="0" bIns="0" rtlCol="0" anchor="ctr"/>
+          <a:lstStyle/>
+          <a:p>
+            <a:pPr algn="r" indent="0" marL="0">
+              <a:buNone/>
+            </a:pPr>
+            <a:r>
+              <a:rPr lang="en-US" sz="1200" dirty="0">
+                <a:solidFill>
+                  <a:srgbClr val="9AA3AD"/>
+                </a:solidFill>
+                <a:latin typeface="Inter" pitchFamily="34" charset="0"/>
+                <a:ea typeface="Inter" pitchFamily="34" charset="-122"/>
+                <a:cs typeface="Inter" pitchFamily="34" charset="-120"/>
+              </a:rPr>
+              <a:t>21</a:t>
+            </a:r>
+            <a:endParaRPr lang="en-US" sz="1200" dirty="0"/>
+          </a:p>
+        </p:txBody>
+      </p:sp>
+      <p:sp>
+        <p:nvSpPr>
+          <p:cNvPr id="133" name="Text 131"/>
+          <p:cNvSpPr txBox="1"/>
+          <p:nvPr/>
+        </p:nvSpPr>
+        <p:spPr>
+          <a:xfrm>
+            <a:off x="6565392" y="5157216"/>
+            <a:ext cx="1783080" cy="384048"/>
           </a:xfrm>
           <a:prstGeom prst="rect">
             <a:avLst/>
@@ -4809,13 +5628,13 @@
       </p:sp>
       <p:sp>
         <p:nvSpPr>
-          <p:cNvPr id="113" name="Shape 111"/>
+          <p:cNvPr id="134" name="Shape 132"/>
           <p:cNvSpPr/>
           <p:nvPr/>
         </p:nvSpPr>
         <p:spPr>
           <a:xfrm>
-            <a:off x="8220456" y="5243627"/>
+            <a:off x="8421624" y="5243627"/>
             <a:ext cx="18288" cy="211226"/>
           </a:xfrm>
           <a:prstGeom prst="rect">
@@ -4829,13 +5648,13 @@
       </p:sp>
       <p:sp>
         <p:nvSpPr>
-          <p:cNvPr id="114" name="Text 112"/>
-          <p:cNvSpPr txBox="1"/>
-          <p:nvPr/>
-        </p:nvSpPr>
-        <p:spPr>
-          <a:xfrm>
-            <a:off x="8860536" y="5157216"/>
+          <p:cNvPr id="135" name="Text 133"/>
+          <p:cNvSpPr txBox="1"/>
+          <p:nvPr/>
+        </p:nvSpPr>
+        <p:spPr>
+          <a:xfrm>
+            <a:off x="8906256" y="5157216"/>
             <a:ext cx="1024128" cy="384048"/>
           </a:xfrm>
           <a:prstGeom prst="rect">
@@ -4868,13 +5687,13 @@
       </p:sp>
       <p:sp>
         <p:nvSpPr>
-          <p:cNvPr id="115" name="Text 113"/>
-          <p:cNvSpPr txBox="1"/>
-          <p:nvPr/>
-        </p:nvSpPr>
-        <p:spPr>
-          <a:xfrm>
-            <a:off x="9884664" y="5157216"/>
+          <p:cNvPr id="136" name="Text 134"/>
+          <p:cNvSpPr txBox="1"/>
+          <p:nvPr/>
+        </p:nvSpPr>
+        <p:spPr>
+          <a:xfrm>
+            <a:off x="9930384" y="5157216"/>
             <a:ext cx="768096" cy="384048"/>
           </a:xfrm>
           <a:prstGeom prst="rect">
@@ -4907,13 +5726,13 @@
       </p:sp>
       <p:sp>
         <p:nvSpPr>
-          <p:cNvPr id="116" name="Text 114"/>
-          <p:cNvSpPr txBox="1"/>
-          <p:nvPr/>
-        </p:nvSpPr>
-        <p:spPr>
-          <a:xfrm>
-            <a:off x="10652760" y="5157216"/>
+          <p:cNvPr id="137" name="Text 135"/>
+          <p:cNvSpPr txBox="1"/>
+          <p:nvPr/>
+        </p:nvSpPr>
+        <p:spPr>
+          <a:xfrm>
+            <a:off x="10698480" y="5157216"/>
             <a:ext cx="768096" cy="384048"/>
           </a:xfrm>
           <a:prstGeom prst="rect">
@@ -4946,7 +5765,27 @@
       </p:sp>
       <p:sp>
         <p:nvSpPr>
-          <p:cNvPr id="117" name="Shape 115"/>
+          <p:cNvPr id="138" name="Shape 136"/>
+          <p:cNvSpPr/>
+          <p:nvPr/>
+        </p:nvSpPr>
+        <p:spPr>
+          <a:xfrm>
+            <a:off x="6085332" y="1700784"/>
+            <a:ext cx="10973" cy="4224528"/>
+          </a:xfrm>
+          <a:prstGeom prst="rect">
+            <a:avLst/>
+          </a:prstGeom>
+          <a:solidFill>
+            <a:srgbClr val="D9D9D9"/>
+          </a:solidFill>
+          <a:ln/>
+        </p:spPr>
+      </p:sp>
+      <p:sp>
+        <p:nvSpPr>
+          <p:cNvPr id="139" name="Shape 137"/>
           <p:cNvSpPr/>
           <p:nvPr/>
         </p:nvSpPr>
@@ -4966,7 +5805,7 @@
       </p:sp>
       <p:sp>
         <p:nvSpPr>
-          <p:cNvPr id="118" name="Text 116"/>
+          <p:cNvPr id="140" name="Text 138"/>
           <p:cNvSpPr txBox="1"/>
           <p:nvPr/>
         </p:nvSpPr>

--- a/day2-deck/decks/Fixed Gross per Employee Gap - Review.pptx
+++ b/day2-deck/decks/Fixed Gross per Employee Gap - Review.pptx
@@ -1312,7 +1312,7 @@
               <a:buNone/>
             </a:pPr>
             <a:r>
-              <a:rPr lang="en-US" sz="1300" dirty="0">
+              <a:rPr lang="en-US" sz="1200" dirty="0">
                 <a:solidFill>
                   <a:srgbClr val="1A1A1A"/>
                 </a:solidFill>
@@ -1322,7 +1322,7 @@
               </a:rPr>
               <a:t>CADILLAC</a:t>
             </a:r>
-            <a:endParaRPr lang="en-US" sz="1300" dirty="0"/>
+            <a:endParaRPr lang="en-US" sz="1200" dirty="0"/>
           </a:p>
         </p:txBody>
       </p:sp>
@@ -1527,7 +1527,7 @@
               <a:buNone/>
             </a:pPr>
             <a:r>
-              <a:rPr lang="en-US" sz="1300" dirty="0">
+              <a:rPr lang="en-US" sz="1200" dirty="0">
                 <a:solidFill>
                   <a:srgbClr val="1A1A1A"/>
                 </a:solidFill>
@@ -1537,7 +1537,7 @@
               </a:rPr>
               <a:t>LINCOLN</a:t>
             </a:r>
-            <a:endParaRPr lang="en-US" sz="1300" dirty="0"/>
+            <a:endParaRPr lang="en-US" sz="1200" dirty="0"/>
           </a:p>
         </p:txBody>
       </p:sp>
@@ -1742,7 +1742,7 @@
               <a:buNone/>
             </a:pPr>
             <a:r>
-              <a:rPr lang="en-US" sz="1300" dirty="0">
+              <a:rPr lang="en-US" sz="1200" dirty="0">
                 <a:solidFill>
                   <a:srgbClr val="1A1A1A"/>
                 </a:solidFill>
@@ -1752,7 +1752,7 @@
               </a:rPr>
               <a:t>CHEVY GMC BULLHEAD</a:t>
             </a:r>
-            <a:endParaRPr lang="en-US" sz="1300" dirty="0"/>
+            <a:endParaRPr lang="en-US" sz="1200" dirty="0"/>
           </a:p>
         </p:txBody>
       </p:sp>
@@ -1957,7 +1957,7 @@
               <a:buNone/>
             </a:pPr>
             <a:r>
-              <a:rPr lang="en-US" sz="1300" dirty="0">
+              <a:rPr lang="en-US" sz="1200" dirty="0">
                 <a:solidFill>
                   <a:srgbClr val="1A1A1A"/>
                 </a:solidFill>
@@ -1967,7 +1967,7 @@
               </a:rPr>
               <a:t>CDJR POST FALLS</a:t>
             </a:r>
-            <a:endParaRPr lang="en-US" sz="1300" dirty="0"/>
+            <a:endParaRPr lang="en-US" sz="1200" dirty="0"/>
           </a:p>
         </p:txBody>
       </p:sp>
@@ -2172,7 +2172,7 @@
               <a:buNone/>
             </a:pPr>
             <a:r>
-              <a:rPr lang="en-US" sz="1300" dirty="0">
+              <a:rPr lang="en-US" sz="1200" dirty="0">
                 <a:solidFill>
                   <a:srgbClr val="1A1A1A"/>
                 </a:solidFill>
@@ -2182,7 +2182,7 @@
               </a:rPr>
               <a:t>CHEVY LV</a:t>
             </a:r>
-            <a:endParaRPr lang="en-US" sz="1300" dirty="0"/>
+            <a:endParaRPr lang="en-US" sz="1200" dirty="0"/>
           </a:p>
         </p:txBody>
       </p:sp>
@@ -2387,7 +2387,7 @@
               <a:buNone/>
             </a:pPr>
             <a:r>
-              <a:rPr lang="en-US" sz="1300" dirty="0">
+              <a:rPr lang="en-US" sz="1200" dirty="0">
                 <a:solidFill>
                   <a:srgbClr val="1A1A1A"/>
                 </a:solidFill>
@@ -2397,7 +2397,7 @@
               </a:rPr>
               <a:t>TOYOTA SPOKANE</a:t>
             </a:r>
-            <a:endParaRPr lang="en-US" sz="1300" dirty="0"/>
+            <a:endParaRPr lang="en-US" sz="1200" dirty="0"/>
           </a:p>
         </p:txBody>
       </p:sp>
@@ -2602,7 +2602,7 @@
               <a:buNone/>
             </a:pPr>
             <a:r>
-              <a:rPr lang="en-US" sz="1300" dirty="0">
+              <a:rPr lang="en-US" sz="1200" dirty="0">
                 <a:solidFill>
                   <a:srgbClr val="1A1A1A"/>
                 </a:solidFill>
@@ -2612,7 +2612,7 @@
               </a:rPr>
               <a:t>TOYOTA FLAGSTAFF</a:t>
             </a:r>
-            <a:endParaRPr lang="en-US" sz="1300" dirty="0"/>
+            <a:endParaRPr lang="en-US" sz="1200" dirty="0"/>
           </a:p>
         </p:txBody>
       </p:sp>
@@ -2817,7 +2817,7 @@
               <a:buNone/>
             </a:pPr>
             <a:r>
-              <a:rPr lang="en-US" sz="1300" dirty="0">
+              <a:rPr lang="en-US" sz="1200" dirty="0">
                 <a:solidFill>
                   <a:srgbClr val="1A1A1A"/>
                 </a:solidFill>
@@ -2827,7 +2827,7 @@
               </a:rPr>
               <a:t>GMC PRESCOTT</a:t>
             </a:r>
-            <a:endParaRPr lang="en-US" sz="1300" dirty="0"/>
+            <a:endParaRPr lang="en-US" sz="1200" dirty="0"/>
           </a:p>
         </p:txBody>
       </p:sp>
@@ -3032,7 +3032,7 @@
               <a:buNone/>
             </a:pPr>
             <a:r>
-              <a:rPr lang="en-US" sz="1300" dirty="0">
+              <a:rPr lang="en-US" sz="1200" dirty="0">
                 <a:solidFill>
                   <a:srgbClr val="1A1A1A"/>
                 </a:solidFill>
@@ -3042,7 +3042,7 @@
               </a:rPr>
               <a:t>TOYOTA PRESCOTT</a:t>
             </a:r>
-            <a:endParaRPr lang="en-US" sz="1300" dirty="0"/>
+            <a:endParaRPr lang="en-US" sz="1200" dirty="0"/>
           </a:p>
         </p:txBody>
       </p:sp>
@@ -3247,7 +3247,7 @@
               <a:buNone/>
             </a:pPr>
             <a:r>
-              <a:rPr lang="en-US" sz="1300" dirty="0">
+              <a:rPr lang="en-US" sz="1200" dirty="0">
                 <a:solidFill>
                   <a:srgbClr val="1A1A1A"/>
                 </a:solidFill>
@@ -3257,7 +3257,7 @@
               </a:rPr>
               <a:t>AUDI RENO</a:t>
             </a:r>
-            <a:endParaRPr lang="en-US" sz="1300" dirty="0"/>
+            <a:endParaRPr lang="en-US" sz="1200" dirty="0"/>
           </a:p>
         </p:txBody>
       </p:sp>
@@ -3462,7 +3462,7 @@
               <a:buNone/>
             </a:pPr>
             <a:r>
-              <a:rPr lang="en-US" sz="1300" dirty="0">
+              <a:rPr lang="en-US" sz="1200" dirty="0">
                 <a:solidFill>
                   <a:srgbClr val="1A1A1A"/>
                 </a:solidFill>
@@ -3472,7 +3472,7 @@
               </a:rPr>
               <a:t>HONDA FLAGSTAFF</a:t>
             </a:r>
-            <a:endParaRPr lang="en-US" sz="1300" dirty="0"/>
+            <a:endParaRPr lang="en-US" sz="1200" dirty="0"/>
           </a:p>
         </p:txBody>
       </p:sp>
@@ -3677,7 +3677,7 @@
               <a:buNone/>
             </a:pPr>
             <a:r>
-              <a:rPr lang="en-US" sz="1300" dirty="0">
+              <a:rPr lang="en-US" sz="1200" dirty="0">
                 <a:solidFill>
                   <a:srgbClr val="1A1A1A"/>
                 </a:solidFill>
@@ -3687,7 +3687,7 @@
               </a:rPr>
               <a:t>NISSAN</a:t>
             </a:r>
-            <a:endParaRPr lang="en-US" sz="1300" dirty="0"/>
+            <a:endParaRPr lang="en-US" sz="1200" dirty="0"/>
           </a:p>
         </p:txBody>
       </p:sp>
@@ -3892,7 +3892,7 @@
               <a:buNone/>
             </a:pPr>
             <a:r>
-              <a:rPr lang="en-US" sz="1300" dirty="0">
+              <a:rPr lang="en-US" sz="1200" dirty="0">
                 <a:solidFill>
                   <a:srgbClr val="1A1A1A"/>
                 </a:solidFill>
@@ -3902,7 +3902,7 @@
               </a:rPr>
               <a:t>VW HENDERSON</a:t>
             </a:r>
-            <a:endParaRPr lang="en-US" sz="1300" dirty="0"/>
+            <a:endParaRPr lang="en-US" sz="1200" dirty="0"/>
           </a:p>
         </p:txBody>
       </p:sp>
@@ -4107,7 +4107,7 @@
               <a:buNone/>
             </a:pPr>
             <a:r>
-              <a:rPr lang="en-US" sz="1300" dirty="0">
+              <a:rPr lang="en-US" sz="1200" dirty="0">
                 <a:solidFill>
                   <a:srgbClr val="1A1A1A"/>
                 </a:solidFill>
@@ -4117,7 +4117,7 @@
               </a:rPr>
               <a:t>VW ST GEORGE</a:t>
             </a:r>
-            <a:endParaRPr lang="en-US" sz="1300" dirty="0"/>
+            <a:endParaRPr lang="en-US" sz="1200" dirty="0"/>
           </a:p>
         </p:txBody>
       </p:sp>
@@ -4322,7 +4322,7 @@
               <a:buNone/>
             </a:pPr>
             <a:r>
-              <a:rPr lang="en-US" sz="1300" dirty="0">
+              <a:rPr lang="en-US" sz="1200" dirty="0">
                 <a:solidFill>
                   <a:srgbClr val="1A1A1A"/>
                 </a:solidFill>
@@ -4332,7 +4332,7 @@
               </a:rPr>
               <a:t>LR RENO</a:t>
             </a:r>
-            <a:endParaRPr lang="en-US" sz="1300" dirty="0"/>
+            <a:endParaRPr lang="en-US" sz="1200" dirty="0"/>
           </a:p>
         </p:txBody>
       </p:sp>
@@ -4537,7 +4537,7 @@
               <a:buNone/>
             </a:pPr>
             <a:r>
-              <a:rPr lang="en-US" sz="1300" dirty="0">
+              <a:rPr lang="en-US" sz="1200" dirty="0">
                 <a:solidFill>
                   <a:srgbClr val="1A1A1A"/>
                 </a:solidFill>
@@ -4547,7 +4547,7 @@
               </a:rPr>
               <a:t>HYUNDAI ST GEORGE</a:t>
             </a:r>
-            <a:endParaRPr lang="en-US" sz="1300" dirty="0"/>
+            <a:endParaRPr lang="en-US" sz="1200" dirty="0"/>
           </a:p>
         </p:txBody>
       </p:sp>
@@ -4752,7 +4752,7 @@
               <a:buNone/>
             </a:pPr>
             <a:r>
-              <a:rPr lang="en-US" sz="1300" dirty="0">
+              <a:rPr lang="en-US" sz="1200" dirty="0">
                 <a:solidFill>
                   <a:srgbClr val="1A1A1A"/>
                 </a:solidFill>
@@ -4762,7 +4762,7 @@
               </a:rPr>
               <a:t>HYUNDAI PRESCOTT</a:t>
             </a:r>
-            <a:endParaRPr lang="en-US" sz="1300" dirty="0"/>
+            <a:endParaRPr lang="en-US" sz="1200" dirty="0"/>
           </a:p>
         </p:txBody>
       </p:sp>
@@ -4967,7 +4967,7 @@
               <a:buNone/>
             </a:pPr>
             <a:r>
-              <a:rPr lang="en-US" sz="1300" dirty="0">
+              <a:rPr lang="en-US" sz="1200" dirty="0">
                 <a:solidFill>
                   <a:srgbClr val="1A1A1A"/>
                 </a:solidFill>
@@ -4977,7 +4977,7 @@
               </a:rPr>
               <a:t>KIA ST GEORGE</a:t>
             </a:r>
-            <a:endParaRPr lang="en-US" sz="1300" dirty="0"/>
+            <a:endParaRPr lang="en-US" sz="1200" dirty="0"/>
           </a:p>
         </p:txBody>
       </p:sp>
@@ -5182,7 +5182,7 @@
               <a:buNone/>
             </a:pPr>
             <a:r>
-              <a:rPr lang="en-US" sz="1300" dirty="0">
+              <a:rPr lang="en-US" sz="1200" dirty="0">
                 <a:solidFill>
                   <a:srgbClr val="1A1A1A"/>
                 </a:solidFill>
@@ -5192,7 +5192,7 @@
               </a:rPr>
               <a:t>ACURA</a:t>
             </a:r>
-            <a:endParaRPr lang="en-US" sz="1300" dirty="0"/>
+            <a:endParaRPr lang="en-US" sz="1200" dirty="0"/>
           </a:p>
         </p:txBody>
       </p:sp>
@@ -5397,7 +5397,7 @@
               <a:buNone/>
             </a:pPr>
             <a:r>
-              <a:rPr lang="en-US" sz="1300" dirty="0">
+              <a:rPr lang="en-US" sz="1200" dirty="0">
                 <a:solidFill>
                   <a:srgbClr val="1A1A1A"/>
                 </a:solidFill>
@@ -5407,7 +5407,7 @@
               </a:rPr>
               <a:t>SUBARU PRESCOTT</a:t>
             </a:r>
-            <a:endParaRPr lang="en-US" sz="1300" dirty="0"/>
+            <a:endParaRPr lang="en-US" sz="1200" dirty="0"/>
           </a:p>
         </p:txBody>
       </p:sp>
@@ -5612,7 +5612,7 @@
               <a:buNone/>
             </a:pPr>
             <a:r>
-              <a:rPr lang="en-US" sz="1300" dirty="0">
+              <a:rPr lang="en-US" sz="1200" dirty="0">
                 <a:solidFill>
                   <a:srgbClr val="1A1A1A"/>
                 </a:solidFill>
@@ -5622,7 +5622,7 @@
               </a:rPr>
               <a:t>LEXUS</a:t>
             </a:r>
-            <a:endParaRPr lang="en-US" sz="1300" dirty="0"/>
+            <a:endParaRPr lang="en-US" sz="1200" dirty="0"/>
           </a:p>
         </p:txBody>
       </p:sp>
